--- a/preview_v7/bio/l-bio-b1-u5-4.pptx
+++ b/preview_v7/bio/l-bio-b1-u5-4.pptx
@@ -3142,14 +3142,102 @@
       </p:sp>
       <p:sp>
         <p:nvSpPr>
-          <p:cNvPr id="3" name="TextBox 2"/>
+          <p:cNvPr id="3" name="Rectangle 2"/>
+          <p:cNvSpPr/>
+          <p:nvPr/>
+        </p:nvSpPr>
+        <p:spPr>
+          <a:xfrm>
+            <a:off x="0" y="0"/>
+            <a:ext cx="12191695" cy="2468880"/>
+          </a:xfrm>
+          <a:prstGeom prst="rect">
+            <a:avLst/>
+          </a:prstGeom>
+          <a:solidFill>
+            <a:srgbClr val="1C2A33"/>
+          </a:solidFill>
+          <a:ln>
+            <a:noFill/>
+          </a:ln>
+          <a:effectLst/>
+        </p:spPr>
+        <p:style>
+          <a:lnRef idx="1">
+            <a:schemeClr val="accent1"/>
+          </a:lnRef>
+          <a:fillRef idx="3">
+            <a:schemeClr val="accent1"/>
+          </a:fillRef>
+          <a:effectRef idx="2">
+            <a:schemeClr val="accent1"/>
+          </a:effectRef>
+          <a:fontRef idx="minor">
+            <a:schemeClr val="lt1"/>
+          </a:fontRef>
+        </p:style>
+        <p:txBody>
+          <a:bodyPr rtlCol="0" anchor="ctr"/>
+          <a:lstStyle/>
+          <a:p>
+            <a:pPr algn="ctr"/>
+          </a:p>
+        </p:txBody>
+      </p:sp>
+      <p:sp>
+        <p:nvSpPr>
+          <p:cNvPr id="4" name="Rectangle 3"/>
+          <p:cNvSpPr/>
+          <p:nvPr/>
+        </p:nvSpPr>
+        <p:spPr>
+          <a:xfrm>
+            <a:off x="640080" y="457200"/>
+            <a:ext cx="822960" cy="38100"/>
+          </a:xfrm>
+          <a:prstGeom prst="rect">
+            <a:avLst/>
+          </a:prstGeom>
+          <a:solidFill>
+            <a:srgbClr val="C8A86B"/>
+          </a:solidFill>
+          <a:ln>
+            <a:noFill/>
+          </a:ln>
+          <a:effectLst/>
+        </p:spPr>
+        <p:style>
+          <a:lnRef idx="1">
+            <a:schemeClr val="accent1"/>
+          </a:lnRef>
+          <a:fillRef idx="3">
+            <a:schemeClr val="accent1"/>
+          </a:fillRef>
+          <a:effectRef idx="2">
+            <a:schemeClr val="accent1"/>
+          </a:effectRef>
+          <a:fontRef idx="minor">
+            <a:schemeClr val="lt1"/>
+          </a:fontRef>
+        </p:style>
+        <p:txBody>
+          <a:bodyPr rtlCol="0" anchor="ctr"/>
+          <a:lstStyle/>
+          <a:p>
+            <a:pPr algn="ctr"/>
+          </a:p>
+        </p:txBody>
+      </p:sp>
+      <p:sp>
+        <p:nvSpPr>
+          <p:cNvPr id="5" name="TextBox 4"/>
           <p:cNvSpPr txBox="1"/>
           <p:nvPr/>
         </p:nvSpPr>
         <p:spPr>
           <a:xfrm>
-            <a:off x="640080" y="640080"/>
-            <a:ext cx="10911535" cy="502920"/>
+            <a:off x="640080" y="566928"/>
+            <a:ext cx="10972800" cy="365760"/>
           </a:xfrm>
           <a:prstGeom prst="rect">
             <a:avLst/>
@@ -3162,34 +3250,104 @@
           </a:bodyPr>
           <a:lstStyle/>
           <a:p>
-            <a:pPr algn="l">
-              <a:spcAft>
-                <a:spcPts val="0"/>
-              </a:spcAft>
-            </a:pPr>
-            <a:r>
-              <a:rPr sz="1200" b="1">
-                <a:solidFill>
-                  <a:srgbClr val="B23A2A"/>
+            <a:pPr algn="l"/>
+            <a:r>
+              <a:rPr sz="1400" b="1">
+                <a:solidFill>
+                  <a:srgbClr val="C8A86B"/>
                 </a:solidFill>
                 <a:latin typeface="微软雅黑"/>
                 <a:ea typeface="微软雅黑"/>
                 <a:cs typeface="微软雅黑"/>
               </a:rPr>
-              <a:t>生物 · 必修1 分子与细胞 · 第5单元 细胞的能量供应和利用</a:t>
-            </a:r>
-          </a:p>
-        </p:txBody>
-      </p:sp>
-      <p:sp>
-        <p:nvSpPr>
-          <p:cNvPr id="4" name="Rectangle 3"/>
+              <a:t>必修1 分子与细胞 · 高一 · 新课</a:t>
+            </a:r>
+          </a:p>
+        </p:txBody>
+      </p:sp>
+      <p:sp>
+        <p:nvSpPr>
+          <p:cNvPr id="6" name="TextBox 5"/>
+          <p:cNvSpPr txBox="1"/>
+          <p:nvPr/>
+        </p:nvSpPr>
+        <p:spPr>
+          <a:xfrm>
+            <a:off x="640080" y="1051560"/>
+            <a:ext cx="11247120" cy="1097280"/>
+          </a:xfrm>
+          <a:prstGeom prst="rect">
+            <a:avLst/>
+          </a:prstGeom>
+          <a:noFill/>
+        </p:spPr>
+        <p:txBody>
+          <a:bodyPr wrap="square" anchor="t" lIns="0" rIns="0" tIns="0" bIns="0">
+            <a:spAutoFit/>
+          </a:bodyPr>
+          <a:lstStyle/>
+          <a:p>
+            <a:pPr algn="l"/>
+            <a:r>
+              <a:rPr sz="4400" b="1">
+                <a:solidFill>
+                  <a:srgbClr val="FFFFFF"/>
+                </a:solidFill>
+                <a:latin typeface="楷体"/>
+                <a:ea typeface="楷体"/>
+                <a:cs typeface="楷体"/>
+              </a:rPr>
+              <a:t>细胞呼吸的过程与意义</a:t>
+            </a:r>
+          </a:p>
+        </p:txBody>
+      </p:sp>
+      <p:sp>
+        <p:nvSpPr>
+          <p:cNvPr id="7" name="TextBox 6"/>
+          <p:cNvSpPr txBox="1"/>
+          <p:nvPr/>
+        </p:nvSpPr>
+        <p:spPr>
+          <a:xfrm>
+            <a:off x="640080" y="1993392"/>
+            <a:ext cx="10972800" cy="457200"/>
+          </a:xfrm>
+          <a:prstGeom prst="rect">
+            <a:avLst/>
+          </a:prstGeom>
+          <a:noFill/>
+        </p:spPr>
+        <p:txBody>
+          <a:bodyPr wrap="square" anchor="t" lIns="0" rIns="0" tIns="0" bIns="0">
+            <a:spAutoFit/>
+          </a:bodyPr>
+          <a:lstStyle/>
+          <a:p>
+            <a:pPr algn="l"/>
+            <a:r>
+              <a:rPr sz="1800" b="0">
+                <a:solidFill>
+                  <a:srgbClr val="E7DFD2"/>
+                </a:solidFill>
+                <a:latin typeface="楷体"/>
+                <a:ea typeface="楷体"/>
+                <a:cs typeface="楷体"/>
+              </a:rPr>
+              <a:t>单元：细胞的能量供应和利用</a:t>
+            </a:r>
+          </a:p>
+        </p:txBody>
+      </p:sp>
+      <p:sp>
+        <p:nvSpPr>
+          <p:cNvPr id="8" name="Rectangle 7"/>
           <p:cNvSpPr/>
           <p:nvPr/>
         </p:nvSpPr>
         <p:spPr>
           <a:xfrm>
-            <a:off x="640080" y="1207008"/>
+            <a:off x="640080" y="2788920"/>
             <a:ext cx="822960" cy="30480"/>
           </a:xfrm>
           <a:prstGeom prst="rect">
@@ -3227,14 +3385,14 @@
       </p:sp>
       <p:sp>
         <p:nvSpPr>
-          <p:cNvPr id="5" name="TextBox 4"/>
+          <p:cNvPr id="9" name="TextBox 8"/>
           <p:cNvSpPr txBox="1"/>
           <p:nvPr/>
         </p:nvSpPr>
         <p:spPr>
           <a:xfrm>
-            <a:off x="640080" y="1737360"/>
-            <a:ext cx="10911535" cy="2011680"/>
+            <a:off x="640080" y="2971800"/>
+            <a:ext cx="10972800" cy="457200"/>
           </a:xfrm>
           <a:prstGeom prst="rect">
             <a:avLst/>
@@ -3247,35 +3405,31 @@
           </a:bodyPr>
           <a:lstStyle/>
           <a:p>
-            <a:pPr algn="l">
-              <a:lnSpc>
-                <a:spcPct val="115000"/>
-              </a:lnSpc>
-            </a:pPr>
-            <a:r>
-              <a:rPr sz="4000" b="1">
-                <a:solidFill>
-                  <a:srgbClr val="1C2A33"/>
+            <a:pPr algn="l"/>
+            <a:r>
+              <a:rPr sz="1500" b="0">
+                <a:solidFill>
+                  <a:srgbClr val="6B6258"/>
                 </a:solidFill>
                 <a:latin typeface="楷体"/>
                 <a:ea typeface="楷体"/>
                 <a:cs typeface="楷体"/>
               </a:rPr>
-              <a:t>细胞呼吸的过程与意义</a:t>
-            </a:r>
-          </a:p>
-        </p:txBody>
-      </p:sp>
-      <p:sp>
-        <p:nvSpPr>
-          <p:cNvPr id="6" name="TextBox 5"/>
+              <a:t>学生课堂版 · 权威调研核实</a:t>
+            </a:r>
+          </a:p>
+        </p:txBody>
+      </p:sp>
+      <p:sp>
+        <p:nvSpPr>
+          <p:cNvPr id="10" name="TextBox 9"/>
           <p:cNvSpPr txBox="1"/>
           <p:nvPr/>
         </p:nvSpPr>
         <p:spPr>
           <a:xfrm>
-            <a:off x="640080" y="3840480"/>
-            <a:ext cx="10911535" cy="457200"/>
+            <a:off x="640080" y="3611880"/>
+            <a:ext cx="10972800" cy="457200"/>
           </a:xfrm>
           <a:prstGeom prst="rect">
             <a:avLst/>
@@ -3290,35 +3444,35 @@
           <a:p>
             <a:pPr algn="l"/>
             <a:r>
-              <a:rPr sz="1700" b="1">
-                <a:solidFill>
-                  <a:srgbClr val="B23A2A"/>
+              <a:rPr sz="1300" b="0">
+                <a:solidFill>
+                  <a:srgbClr val="2E7D6B"/>
                 </a:solidFill>
                 <a:latin typeface="微软雅黑"/>
                 <a:ea typeface="微软雅黑"/>
                 <a:cs typeface="微软雅黑"/>
               </a:rPr>
-              <a:t>新课  ·  第18课时  ·  45分钟</a:t>
-            </a:r>
-          </a:p>
-        </p:txBody>
-      </p:sp>
-      <p:sp>
-        <p:nvSpPr>
-          <p:cNvPr id="7" name="Rectangle 6"/>
+              <a:t>#有氧呼吸  #无氧呼吸  #糖酵解  #柠檬酸循环  #必修1Ch5  #第十八课时</a:t>
+            </a:r>
+          </a:p>
+        </p:txBody>
+      </p:sp>
+      <p:sp>
+        <p:nvSpPr>
+          <p:cNvPr id="11" name="Rectangle 10"/>
           <p:cNvSpPr/>
           <p:nvPr/>
         </p:nvSpPr>
         <p:spPr>
           <a:xfrm>
-            <a:off x="640080" y="5394960"/>
-            <a:ext cx="2011680" cy="33020"/>
+            <a:off x="0" y="6355080"/>
+            <a:ext cx="12191695" cy="502920"/>
           </a:xfrm>
           <a:prstGeom prst="rect">
             <a:avLst/>
           </a:prstGeom>
           <a:solidFill>
-            <a:srgbClr val="C8A86B"/>
+            <a:srgbClr val="2E7D6B"/>
           </a:solidFill>
           <a:ln>
             <a:noFill/>
@@ -3349,14 +3503,14 @@
       </p:sp>
       <p:sp>
         <p:nvSpPr>
-          <p:cNvPr id="8" name="TextBox 7"/>
+          <p:cNvPr id="12" name="TextBox 11"/>
           <p:cNvSpPr txBox="1"/>
           <p:nvPr/>
         </p:nvSpPr>
         <p:spPr>
           <a:xfrm>
-            <a:off x="640080" y="5623560"/>
-            <a:ext cx="10911535" cy="548640"/>
+            <a:off x="640080" y="6400800"/>
+            <a:ext cx="10972800" cy="365760"/>
           </a:xfrm>
           <a:prstGeom prst="rect">
             <a:avLst/>
@@ -3371,22 +3525,22 @@
           <a:p>
             <a:pPr algn="l"/>
             <a:r>
-              <a:rPr sz="1400" b="0">
-                <a:solidFill>
-                  <a:srgbClr val="6B6258"/>
+              <a:rPr sz="1200" b="0">
+                <a:solidFill>
+                  <a:srgbClr val="FFFFFF"/>
                 </a:solidFill>
                 <a:latin typeface="微软雅黑"/>
                 <a:ea typeface="微软雅黑"/>
                 <a:cs typeface="微软雅黑"/>
               </a:rPr>
-              <a:t>学习任务群：    |    年级：高一</a:t>
-            </a:r>
-          </a:p>
-        </p:txBody>
-      </p:sp>
-      <p:sp>
-        <p:nvSpPr>
-          <p:cNvPr id="9" name="TextBox 8"/>
+              <a:t>本课件未使用无关配图 · 学科色块兜底</a:t>
+            </a:r>
+          </a:p>
+        </p:txBody>
+      </p:sp>
+      <p:sp>
+        <p:nvSpPr>
+          <p:cNvPr id="13" name="TextBox 12"/>
           <p:cNvSpPr txBox="1"/>
           <p:nvPr/>
         </p:nvSpPr>
@@ -3416,7 +3570,7 @@
                 <a:ea typeface="微软雅黑"/>
                 <a:cs typeface="微软雅黑"/>
               </a:rPr>
-              <a:t>01</a:t>
+              <a:t>28</a:t>
             </a:r>
           </a:p>
         </p:txBody>
@@ -3570,14 +3724,51 @@
       </p:sp>
       <p:sp>
         <p:nvSpPr>
-          <p:cNvPr id="5" name="Rounded Rectangle 4"/>
+          <p:cNvPr id="5" name="TextBox 4"/>
+          <p:cNvSpPr txBox="1"/>
+          <p:nvPr/>
+        </p:nvSpPr>
+        <p:spPr>
+          <a:xfrm>
+            <a:off x="640080" y="1325880"/>
+            <a:ext cx="10058400" cy="548640"/>
+          </a:xfrm>
+          <a:prstGeom prst="rect">
+            <a:avLst/>
+          </a:prstGeom>
+          <a:noFill/>
+        </p:spPr>
+        <p:txBody>
+          <a:bodyPr wrap="square" anchor="t" lIns="0" rIns="0" tIns="0" bIns="0">
+            <a:spAutoFit/>
+          </a:bodyPr>
+          <a:lstStyle/>
+          <a:p>
+            <a:pPr algn="l"/>
+            <a:r>
+              <a:rPr sz="3000" b="1">
+                <a:solidFill>
+                  <a:srgbClr val="1C2A33"/>
+                </a:solidFill>
+                <a:latin typeface="楷体"/>
+                <a:ea typeface="楷体"/>
+                <a:cs typeface="楷体"/>
+              </a:rPr>
+              <a:t>四向学习目标</a:t>
+            </a:r>
+          </a:p>
+        </p:txBody>
+      </p:sp>
+      <p:sp>
+        <p:nvSpPr>
+          <p:cNvPr id="6" name="Rounded Rectangle 5"/>
           <p:cNvSpPr/>
           <p:nvPr/>
         </p:nvSpPr>
         <p:spPr>
           <a:xfrm>
-            <a:off x="640080" y="1417320"/>
-            <a:ext cx="5349240" cy="2057400"/>
+            <a:off x="640080" y="2377440"/>
+            <a:ext cx="2453563" cy="3383280"/>
           </a:xfrm>
           <a:prstGeom prst="roundRect">
             <a:avLst/>
@@ -3585,7 +3776,7 @@
           <a:solidFill>
             <a:srgbClr val="FFFFFF"/>
           </a:solidFill>
-          <a:ln w="22860">
+          <a:ln w="20320">
             <a:solidFill>
               <a:srgbClr val="B23A2A"/>
             </a:solidFill>
@@ -3616,14 +3807,14 @@
       </p:sp>
       <p:sp>
         <p:nvSpPr>
-          <p:cNvPr id="6" name="Oval 5"/>
+          <p:cNvPr id="7" name="Oval 6"/>
           <p:cNvSpPr/>
           <p:nvPr/>
         </p:nvSpPr>
         <p:spPr>
           <a:xfrm>
-            <a:off x="804672" y="1581912"/>
-            <a:ext cx="457200" cy="457200"/>
+            <a:off x="1455381" y="2651760"/>
+            <a:ext cx="822960" cy="822960"/>
           </a:xfrm>
           <a:prstGeom prst="ellipse">
             <a:avLst/>
@@ -3660,14 +3851,14 @@
       </p:sp>
       <p:sp>
         <p:nvSpPr>
-          <p:cNvPr id="7" name="TextBox 6"/>
+          <p:cNvPr id="8" name="TextBox 7"/>
           <p:cNvSpPr txBox="1"/>
           <p:nvPr/>
         </p:nvSpPr>
         <p:spPr>
           <a:xfrm>
-            <a:off x="804672" y="1636776"/>
-            <a:ext cx="457200" cy="384048"/>
+            <a:off x="1455381" y="2834640"/>
+            <a:ext cx="822960" cy="457200"/>
           </a:xfrm>
           <a:prstGeom prst="rect">
             <a:avLst/>
@@ -3682,29 +3873,66 @@
           <a:p>
             <a:pPr algn="ctr"/>
             <a:r>
-              <a:rPr sz="1600" b="1">
+              <a:rPr sz="2400" b="1">
                 <a:solidFill>
                   <a:srgbClr val="FFFFFF"/>
+                </a:solidFill>
+                <a:latin typeface="楷体"/>
+                <a:ea typeface="楷体"/>
+                <a:cs typeface="楷体"/>
+              </a:rPr>
+              <a:t>1</a:t>
+            </a:r>
+          </a:p>
+        </p:txBody>
+      </p:sp>
+      <p:sp>
+        <p:nvSpPr>
+          <p:cNvPr id="9" name="TextBox 8"/>
+          <p:cNvSpPr txBox="1"/>
+          <p:nvPr/>
+        </p:nvSpPr>
+        <p:spPr>
+          <a:xfrm>
+            <a:off x="822960" y="3703320"/>
+            <a:ext cx="2087803" cy="457200"/>
+          </a:xfrm>
+          <a:prstGeom prst="rect">
+            <a:avLst/>
+          </a:prstGeom>
+          <a:noFill/>
+        </p:spPr>
+        <p:txBody>
+          <a:bodyPr wrap="square" anchor="t" lIns="0" rIns="0" tIns="0" bIns="0">
+            <a:spAutoFit/>
+          </a:bodyPr>
+          <a:lstStyle/>
+          <a:p>
+            <a:pPr algn="ctr"/>
+            <a:r>
+              <a:rPr sz="1700" b="1">
+                <a:solidFill>
+                  <a:srgbClr val="B23A2A"/>
                 </a:solidFill>
                 <a:latin typeface="微软雅黑"/>
                 <a:ea typeface="微软雅黑"/>
                 <a:cs typeface="微软雅黑"/>
               </a:rPr>
-              <a:t>1</a:t>
-            </a:r>
-          </a:p>
-        </p:txBody>
-      </p:sp>
-      <p:sp>
-        <p:nvSpPr>
-          <p:cNvPr id="8" name="TextBox 7"/>
+              <a:t>生命观念</a:t>
+            </a:r>
+          </a:p>
+        </p:txBody>
+      </p:sp>
+      <p:sp>
+        <p:nvSpPr>
+          <p:cNvPr id="10" name="TextBox 9"/>
           <p:cNvSpPr txBox="1"/>
           <p:nvPr/>
         </p:nvSpPr>
         <p:spPr>
           <a:xfrm>
-            <a:off x="1371600" y="1527048"/>
-            <a:ext cx="4434840" cy="457200"/>
+            <a:off x="841248" y="4251959"/>
+            <a:ext cx="2051227" cy="1371600"/>
           </a:xfrm>
           <a:prstGeom prst="rect">
             <a:avLst/>
@@ -3717,54 +3945,13 @@
           </a:bodyPr>
           <a:lstStyle/>
           <a:p>
-            <a:pPr algn="l">
+            <a:pPr algn="ctr">
               <a:lnSpc>
-                <a:spcPct val="110000"/>
+                <a:spcPct val="145000"/>
               </a:lnSpc>
             </a:pPr>
             <a:r>
-              <a:rPr sz="1600" b="1">
-                <a:solidFill>
-                  <a:srgbClr val="1C2A33"/>
-                </a:solidFill>
-                <a:latin typeface="微软雅黑"/>
-                <a:ea typeface="微软雅黑"/>
-                <a:cs typeface="微软雅黑"/>
-              </a:rPr>
-              <a:t>目标</a:t>
-            </a:r>
-          </a:p>
-        </p:txBody>
-      </p:sp>
-      <p:sp>
-        <p:nvSpPr>
-          <p:cNvPr id="9" name="TextBox 8"/>
-          <p:cNvSpPr txBox="1"/>
-          <p:nvPr/>
-        </p:nvSpPr>
-        <p:spPr>
-          <a:xfrm>
-            <a:off x="1371600" y="1965960"/>
-            <a:ext cx="4434840" cy="1417320"/>
-          </a:xfrm>
-          <a:prstGeom prst="rect">
-            <a:avLst/>
-          </a:prstGeom>
-          <a:noFill/>
-        </p:spPr>
-        <p:txBody>
-          <a:bodyPr wrap="square" anchor="t" lIns="0" rIns="0" tIns="0" bIns="0">
-            <a:spAutoFit/>
-          </a:bodyPr>
-          <a:lstStyle/>
-          <a:p>
-            <a:pPr algn="l">
-              <a:lnSpc>
-                <a:spcPct val="128000"/>
-              </a:lnSpc>
-            </a:pPr>
-            <a:r>
-              <a:rPr sz="1400" b="0">
+              <a:rPr sz="1300" b="0">
                 <a:solidFill>
                   <a:srgbClr val="1C2A33"/>
                 </a:solidFill>
@@ -3772,21 +3959,21 @@
                 <a:ea typeface="楷体"/>
                 <a:cs typeface="楷体"/>
               </a:rPr>
-              <a:t>生命观念：阐明细胞呼吸的过程与实质，认同能量逐步释放与高效利用。</a:t>
-            </a:r>
-          </a:p>
-        </p:txBody>
-      </p:sp>
-      <p:sp>
-        <p:nvSpPr>
-          <p:cNvPr id="10" name="Rounded Rectangle 9"/>
+              <a:t>阐明细胞呼吸的过程与实质，认同能量逐步释放与高效利用。</a:t>
+            </a:r>
+          </a:p>
+        </p:txBody>
+      </p:sp>
+      <p:sp>
+        <p:nvSpPr>
+          <p:cNvPr id="11" name="Rounded Rectangle 10"/>
           <p:cNvSpPr/>
           <p:nvPr/>
         </p:nvSpPr>
         <p:spPr>
           <a:xfrm>
-            <a:off x="6263640" y="1417320"/>
-            <a:ext cx="5349240" cy="2057400"/>
+            <a:off x="3459403" y="2377440"/>
+            <a:ext cx="2453563" cy="3383280"/>
           </a:xfrm>
           <a:prstGeom prst="roundRect">
             <a:avLst/>
@@ -3794,9 +3981,9 @@
           <a:solidFill>
             <a:srgbClr val="FFFFFF"/>
           </a:solidFill>
-          <a:ln w="22860">
+          <a:ln w="20320">
             <a:solidFill>
-              <a:srgbClr val="B23A2A"/>
+              <a:srgbClr val="2E7D6B"/>
             </a:solidFill>
           </a:ln>
           <a:effectLst/>
@@ -3825,20 +4012,20 @@
       </p:sp>
       <p:sp>
         <p:nvSpPr>
-          <p:cNvPr id="11" name="Oval 10"/>
+          <p:cNvPr id="12" name="Oval 11"/>
           <p:cNvSpPr/>
           <p:nvPr/>
         </p:nvSpPr>
         <p:spPr>
           <a:xfrm>
-            <a:off x="6428232" y="1581912"/>
-            <a:ext cx="457200" cy="457200"/>
+            <a:off x="4274705" y="2651760"/>
+            <a:ext cx="822960" cy="822960"/>
           </a:xfrm>
           <a:prstGeom prst="ellipse">
             <a:avLst/>
           </a:prstGeom>
           <a:solidFill>
-            <a:srgbClr val="B23A2A"/>
+            <a:srgbClr val="2E7D6B"/>
           </a:solidFill>
           <a:ln>
             <a:noFill/>
@@ -3869,14 +4056,14 @@
       </p:sp>
       <p:sp>
         <p:nvSpPr>
-          <p:cNvPr id="12" name="TextBox 11"/>
+          <p:cNvPr id="13" name="TextBox 12"/>
           <p:cNvSpPr txBox="1"/>
           <p:nvPr/>
         </p:nvSpPr>
         <p:spPr>
           <a:xfrm>
-            <a:off x="6428232" y="1636776"/>
-            <a:ext cx="457200" cy="384048"/>
+            <a:off x="4274705" y="2834640"/>
+            <a:ext cx="822960" cy="457200"/>
           </a:xfrm>
           <a:prstGeom prst="rect">
             <a:avLst/>
@@ -3891,29 +4078,66 @@
           <a:p>
             <a:pPr algn="ctr"/>
             <a:r>
-              <a:rPr sz="1600" b="1">
+              <a:rPr sz="2400" b="1">
                 <a:solidFill>
                   <a:srgbClr val="FFFFFF"/>
+                </a:solidFill>
+                <a:latin typeface="楷体"/>
+                <a:ea typeface="楷体"/>
+                <a:cs typeface="楷体"/>
+              </a:rPr>
+              <a:t>2</a:t>
+            </a:r>
+          </a:p>
+        </p:txBody>
+      </p:sp>
+      <p:sp>
+        <p:nvSpPr>
+          <p:cNvPr id="14" name="TextBox 13"/>
+          <p:cNvSpPr txBox="1"/>
+          <p:nvPr/>
+        </p:nvSpPr>
+        <p:spPr>
+          <a:xfrm>
+            <a:off x="3642283" y="3703320"/>
+            <a:ext cx="2087803" cy="457200"/>
+          </a:xfrm>
+          <a:prstGeom prst="rect">
+            <a:avLst/>
+          </a:prstGeom>
+          <a:noFill/>
+        </p:spPr>
+        <p:txBody>
+          <a:bodyPr wrap="square" anchor="t" lIns="0" rIns="0" tIns="0" bIns="0">
+            <a:spAutoFit/>
+          </a:bodyPr>
+          <a:lstStyle/>
+          <a:p>
+            <a:pPr algn="ctr"/>
+            <a:r>
+              <a:rPr sz="1700" b="1">
+                <a:solidFill>
+                  <a:srgbClr val="2E7D6B"/>
                 </a:solidFill>
                 <a:latin typeface="微软雅黑"/>
                 <a:ea typeface="微软雅黑"/>
                 <a:cs typeface="微软雅黑"/>
               </a:rPr>
-              <a:t>2</a:t>
-            </a:r>
-          </a:p>
-        </p:txBody>
-      </p:sp>
-      <p:sp>
-        <p:nvSpPr>
-          <p:cNvPr id="13" name="TextBox 12"/>
+              <a:t>科学思维</a:t>
+            </a:r>
+          </a:p>
+        </p:txBody>
+      </p:sp>
+      <p:sp>
+        <p:nvSpPr>
+          <p:cNvPr id="15" name="TextBox 14"/>
           <p:cNvSpPr txBox="1"/>
           <p:nvPr/>
         </p:nvSpPr>
         <p:spPr>
           <a:xfrm>
-            <a:off x="6995160" y="1527048"/>
-            <a:ext cx="4434840" cy="457200"/>
+            <a:off x="3660571" y="4251959"/>
+            <a:ext cx="2051227" cy="1371600"/>
           </a:xfrm>
           <a:prstGeom prst="rect">
             <a:avLst/>
@@ -3926,54 +4150,13 @@
           </a:bodyPr>
           <a:lstStyle/>
           <a:p>
-            <a:pPr algn="l">
+            <a:pPr algn="ctr">
               <a:lnSpc>
-                <a:spcPct val="110000"/>
+                <a:spcPct val="145000"/>
               </a:lnSpc>
             </a:pPr>
             <a:r>
-              <a:rPr sz="1600" b="1">
-                <a:solidFill>
-                  <a:srgbClr val="1C2A33"/>
-                </a:solidFill>
-                <a:latin typeface="微软雅黑"/>
-                <a:ea typeface="微软雅黑"/>
-                <a:cs typeface="微软雅黑"/>
-              </a:rPr>
-              <a:t>目标</a:t>
-            </a:r>
-          </a:p>
-        </p:txBody>
-      </p:sp>
-      <p:sp>
-        <p:nvSpPr>
-          <p:cNvPr id="14" name="TextBox 13"/>
-          <p:cNvSpPr txBox="1"/>
-          <p:nvPr/>
-        </p:nvSpPr>
-        <p:spPr>
-          <a:xfrm>
-            <a:off x="6995160" y="1965960"/>
-            <a:ext cx="4434840" cy="1417320"/>
-          </a:xfrm>
-          <a:prstGeom prst="rect">
-            <a:avLst/>
-          </a:prstGeom>
-          <a:noFill/>
-        </p:spPr>
-        <p:txBody>
-          <a:bodyPr wrap="square" anchor="t" lIns="0" rIns="0" tIns="0" bIns="0">
-            <a:spAutoFit/>
-          </a:bodyPr>
-          <a:lstStyle/>
-          <a:p>
-            <a:pPr algn="l">
-              <a:lnSpc>
-                <a:spcPct val="128000"/>
-              </a:lnSpc>
-            </a:pPr>
-            <a:r>
-              <a:rPr sz="1400" b="0">
+              <a:rPr sz="1300" b="0">
                 <a:solidFill>
                   <a:srgbClr val="1C2A33"/>
                 </a:solidFill>
@@ -3981,21 +4164,21 @@
                 <a:ea typeface="楷体"/>
                 <a:cs typeface="楷体"/>
               </a:rPr>
-              <a:t>科学思维：比较有氧呼吸三阶段及与无氧呼吸的异同。</a:t>
-            </a:r>
-          </a:p>
-        </p:txBody>
-      </p:sp>
-      <p:sp>
-        <p:nvSpPr>
-          <p:cNvPr id="15" name="Rounded Rectangle 14"/>
+              <a:t>比较有氧呼吸三阶段及与无氧呼吸的异同。</a:t>
+            </a:r>
+          </a:p>
+        </p:txBody>
+      </p:sp>
+      <p:sp>
+        <p:nvSpPr>
+          <p:cNvPr id="16" name="Rounded Rectangle 15"/>
           <p:cNvSpPr/>
           <p:nvPr/>
         </p:nvSpPr>
         <p:spPr>
           <a:xfrm>
-            <a:off x="640080" y="3703320"/>
-            <a:ext cx="5349240" cy="2057400"/>
+            <a:off x="6278727" y="2377440"/>
+            <a:ext cx="2453563" cy="3383280"/>
           </a:xfrm>
           <a:prstGeom prst="roundRect">
             <a:avLst/>
@@ -4003,9 +4186,9 @@
           <a:solidFill>
             <a:srgbClr val="FFFFFF"/>
           </a:solidFill>
-          <a:ln w="22860">
+          <a:ln w="20320">
             <a:solidFill>
-              <a:srgbClr val="B23A2A"/>
+              <a:srgbClr val="C8A86B"/>
             </a:solidFill>
           </a:ln>
           <a:effectLst/>
@@ -4034,20 +4217,20 @@
       </p:sp>
       <p:sp>
         <p:nvSpPr>
-          <p:cNvPr id="16" name="Oval 15"/>
+          <p:cNvPr id="17" name="Oval 16"/>
           <p:cNvSpPr/>
           <p:nvPr/>
         </p:nvSpPr>
         <p:spPr>
           <a:xfrm>
-            <a:off x="804672" y="3867912"/>
-            <a:ext cx="457200" cy="457200"/>
+            <a:off x="7094029" y="2651760"/>
+            <a:ext cx="822960" cy="822960"/>
           </a:xfrm>
           <a:prstGeom prst="ellipse">
             <a:avLst/>
           </a:prstGeom>
           <a:solidFill>
-            <a:srgbClr val="B23A2A"/>
+            <a:srgbClr val="C8A86B"/>
           </a:solidFill>
           <a:ln>
             <a:noFill/>
@@ -4078,14 +4261,14 @@
       </p:sp>
       <p:sp>
         <p:nvSpPr>
-          <p:cNvPr id="17" name="TextBox 16"/>
+          <p:cNvPr id="18" name="TextBox 17"/>
           <p:cNvSpPr txBox="1"/>
           <p:nvPr/>
         </p:nvSpPr>
         <p:spPr>
           <a:xfrm>
-            <a:off x="804672" y="3922776"/>
-            <a:ext cx="457200" cy="384048"/>
+            <a:off x="7094029" y="2834640"/>
+            <a:ext cx="822960" cy="457200"/>
           </a:xfrm>
           <a:prstGeom prst="rect">
             <a:avLst/>
@@ -4100,29 +4283,66 @@
           <a:p>
             <a:pPr algn="ctr"/>
             <a:r>
-              <a:rPr sz="1600" b="1">
+              <a:rPr sz="2400" b="1">
                 <a:solidFill>
                   <a:srgbClr val="FFFFFF"/>
+                </a:solidFill>
+                <a:latin typeface="楷体"/>
+                <a:ea typeface="楷体"/>
+                <a:cs typeface="楷体"/>
+              </a:rPr>
+              <a:t>3</a:t>
+            </a:r>
+          </a:p>
+        </p:txBody>
+      </p:sp>
+      <p:sp>
+        <p:nvSpPr>
+          <p:cNvPr id="19" name="TextBox 18"/>
+          <p:cNvSpPr txBox="1"/>
+          <p:nvPr/>
+        </p:nvSpPr>
+        <p:spPr>
+          <a:xfrm>
+            <a:off x="6461607" y="3703320"/>
+            <a:ext cx="2087803" cy="457200"/>
+          </a:xfrm>
+          <a:prstGeom prst="rect">
+            <a:avLst/>
+          </a:prstGeom>
+          <a:noFill/>
+        </p:spPr>
+        <p:txBody>
+          <a:bodyPr wrap="square" anchor="t" lIns="0" rIns="0" tIns="0" bIns="0">
+            <a:spAutoFit/>
+          </a:bodyPr>
+          <a:lstStyle/>
+          <a:p>
+            <a:pPr algn="ctr"/>
+            <a:r>
+              <a:rPr sz="1700" b="1">
+                <a:solidFill>
+                  <a:srgbClr val="C8A86B"/>
                 </a:solidFill>
                 <a:latin typeface="微软雅黑"/>
                 <a:ea typeface="微软雅黑"/>
                 <a:cs typeface="微软雅黑"/>
               </a:rPr>
-              <a:t>3</a:t>
-            </a:r>
-          </a:p>
-        </p:txBody>
-      </p:sp>
-      <p:sp>
-        <p:nvSpPr>
-          <p:cNvPr id="18" name="TextBox 17"/>
+              <a:t>科学探究</a:t>
+            </a:r>
+          </a:p>
+        </p:txBody>
+      </p:sp>
+      <p:sp>
+        <p:nvSpPr>
+          <p:cNvPr id="20" name="TextBox 19"/>
           <p:cNvSpPr txBox="1"/>
           <p:nvPr/>
         </p:nvSpPr>
         <p:spPr>
           <a:xfrm>
-            <a:off x="1371600" y="3813048"/>
-            <a:ext cx="4434840" cy="457200"/>
+            <a:off x="6479895" y="4251959"/>
+            <a:ext cx="2051227" cy="1371600"/>
           </a:xfrm>
           <a:prstGeom prst="rect">
             <a:avLst/>
@@ -4135,54 +4355,13 @@
           </a:bodyPr>
           <a:lstStyle/>
           <a:p>
-            <a:pPr algn="l">
+            <a:pPr algn="ctr">
               <a:lnSpc>
-                <a:spcPct val="110000"/>
+                <a:spcPct val="145000"/>
               </a:lnSpc>
             </a:pPr>
             <a:r>
-              <a:rPr sz="1600" b="1">
-                <a:solidFill>
-                  <a:srgbClr val="1C2A33"/>
-                </a:solidFill>
-                <a:latin typeface="微软雅黑"/>
-                <a:ea typeface="微软雅黑"/>
-                <a:cs typeface="微软雅黑"/>
-              </a:rPr>
-              <a:t>目标</a:t>
-            </a:r>
-          </a:p>
-        </p:txBody>
-      </p:sp>
-      <p:sp>
-        <p:nvSpPr>
-          <p:cNvPr id="19" name="TextBox 18"/>
-          <p:cNvSpPr txBox="1"/>
-          <p:nvPr/>
-        </p:nvSpPr>
-        <p:spPr>
-          <a:xfrm>
-            <a:off x="1371600" y="4251960"/>
-            <a:ext cx="4434840" cy="1417320"/>
-          </a:xfrm>
-          <a:prstGeom prst="rect">
-            <a:avLst/>
-          </a:prstGeom>
-          <a:noFill/>
-        </p:spPr>
-        <p:txBody>
-          <a:bodyPr wrap="square" anchor="t" lIns="0" rIns="0" tIns="0" bIns="0">
-            <a:spAutoFit/>
-          </a:bodyPr>
-          <a:lstStyle/>
-          <a:p>
-            <a:pPr algn="l">
-              <a:lnSpc>
-                <a:spcPct val="128000"/>
-              </a:lnSpc>
-            </a:pPr>
-            <a:r>
-              <a:rPr sz="1400" b="0">
+              <a:rPr sz="1300" b="0">
                 <a:solidFill>
                   <a:srgbClr val="1C2A33"/>
                 </a:solidFill>
@@ -4190,21 +4369,21 @@
                 <a:ea typeface="楷体"/>
                 <a:cs typeface="楷体"/>
               </a:rPr>
-              <a:t>科学探究：探究酵母菌细胞呼吸方式（有氧/无氧）。</a:t>
-            </a:r>
-          </a:p>
-        </p:txBody>
-      </p:sp>
-      <p:sp>
-        <p:nvSpPr>
-          <p:cNvPr id="20" name="Rounded Rectangle 19"/>
+              <a:t>探究酵母菌细胞呼吸方式（有氧/无氧）。</a:t>
+            </a:r>
+          </a:p>
+        </p:txBody>
+      </p:sp>
+      <p:sp>
+        <p:nvSpPr>
+          <p:cNvPr id="21" name="Rounded Rectangle 20"/>
           <p:cNvSpPr/>
           <p:nvPr/>
         </p:nvSpPr>
         <p:spPr>
           <a:xfrm>
-            <a:off x="6263640" y="3703320"/>
-            <a:ext cx="5349240" cy="2057400"/>
+            <a:off x="9098051" y="2377440"/>
+            <a:ext cx="2453563" cy="3383280"/>
           </a:xfrm>
           <a:prstGeom prst="roundRect">
             <a:avLst/>
@@ -4212,9 +4391,9 @@
           <a:solidFill>
             <a:srgbClr val="FFFFFF"/>
           </a:solidFill>
-          <a:ln w="22860">
+          <a:ln w="20320">
             <a:solidFill>
-              <a:srgbClr val="B23A2A"/>
+              <a:srgbClr val="6B6258"/>
             </a:solidFill>
           </a:ln>
           <a:effectLst/>
@@ -4243,20 +4422,20 @@
       </p:sp>
       <p:sp>
         <p:nvSpPr>
-          <p:cNvPr id="21" name="Oval 20"/>
+          <p:cNvPr id="22" name="Oval 21"/>
           <p:cNvSpPr/>
           <p:nvPr/>
         </p:nvSpPr>
         <p:spPr>
           <a:xfrm>
-            <a:off x="6428232" y="3867912"/>
-            <a:ext cx="457200" cy="457200"/>
+            <a:off x="9913353" y="2651760"/>
+            <a:ext cx="822960" cy="822960"/>
           </a:xfrm>
           <a:prstGeom prst="ellipse">
             <a:avLst/>
           </a:prstGeom>
           <a:solidFill>
-            <a:srgbClr val="B23A2A"/>
+            <a:srgbClr val="6B6258"/>
           </a:solidFill>
           <a:ln>
             <a:noFill/>
@@ -4287,14 +4466,14 @@
       </p:sp>
       <p:sp>
         <p:nvSpPr>
-          <p:cNvPr id="22" name="TextBox 21"/>
+          <p:cNvPr id="23" name="TextBox 22"/>
           <p:cNvSpPr txBox="1"/>
           <p:nvPr/>
         </p:nvSpPr>
         <p:spPr>
           <a:xfrm>
-            <a:off x="6428232" y="3922776"/>
-            <a:ext cx="457200" cy="384048"/>
+            <a:off x="9913353" y="2834640"/>
+            <a:ext cx="822960" cy="457200"/>
           </a:xfrm>
           <a:prstGeom prst="rect">
             <a:avLst/>
@@ -4309,29 +4488,66 @@
           <a:p>
             <a:pPr algn="ctr"/>
             <a:r>
-              <a:rPr sz="1600" b="1">
+              <a:rPr sz="2400" b="1">
                 <a:solidFill>
                   <a:srgbClr val="FFFFFF"/>
+                </a:solidFill>
+                <a:latin typeface="楷体"/>
+                <a:ea typeface="楷体"/>
+                <a:cs typeface="楷体"/>
+              </a:rPr>
+              <a:t>4</a:t>
+            </a:r>
+          </a:p>
+        </p:txBody>
+      </p:sp>
+      <p:sp>
+        <p:nvSpPr>
+          <p:cNvPr id="24" name="TextBox 23"/>
+          <p:cNvSpPr txBox="1"/>
+          <p:nvPr/>
+        </p:nvSpPr>
+        <p:spPr>
+          <a:xfrm>
+            <a:off x="9280931" y="3703320"/>
+            <a:ext cx="2087803" cy="457200"/>
+          </a:xfrm>
+          <a:prstGeom prst="rect">
+            <a:avLst/>
+          </a:prstGeom>
+          <a:noFill/>
+        </p:spPr>
+        <p:txBody>
+          <a:bodyPr wrap="square" anchor="t" lIns="0" rIns="0" tIns="0" bIns="0">
+            <a:spAutoFit/>
+          </a:bodyPr>
+          <a:lstStyle/>
+          <a:p>
+            <a:pPr algn="ctr"/>
+            <a:r>
+              <a:rPr sz="1700" b="1">
+                <a:solidFill>
+                  <a:srgbClr val="6B6258"/>
                 </a:solidFill>
                 <a:latin typeface="微软雅黑"/>
                 <a:ea typeface="微软雅黑"/>
                 <a:cs typeface="微软雅黑"/>
               </a:rPr>
-              <a:t>4</a:t>
-            </a:r>
-          </a:p>
-        </p:txBody>
-      </p:sp>
-      <p:sp>
-        <p:nvSpPr>
-          <p:cNvPr id="23" name="TextBox 22"/>
+              <a:t>社会责任</a:t>
+            </a:r>
+          </a:p>
+        </p:txBody>
+      </p:sp>
+      <p:sp>
+        <p:nvSpPr>
+          <p:cNvPr id="25" name="TextBox 24"/>
           <p:cNvSpPr txBox="1"/>
           <p:nvPr/>
         </p:nvSpPr>
         <p:spPr>
           <a:xfrm>
-            <a:off x="6995160" y="3813048"/>
-            <a:ext cx="4434840" cy="457200"/>
+            <a:off x="9299219" y="4251959"/>
+            <a:ext cx="2051227" cy="1371600"/>
           </a:xfrm>
           <a:prstGeom prst="rect">
             <a:avLst/>
@@ -4344,99 +4560,58 @@
           </a:bodyPr>
           <a:lstStyle/>
           <a:p>
-            <a:pPr algn="l">
+            <a:pPr algn="ctr">
               <a:lnSpc>
-                <a:spcPct val="110000"/>
+                <a:spcPct val="145000"/>
               </a:lnSpc>
             </a:pPr>
             <a:r>
-              <a:rPr sz="1600" b="1">
+              <a:rPr sz="1300" b="0">
                 <a:solidFill>
                   <a:srgbClr val="1C2A33"/>
+                </a:solidFill>
+                <a:latin typeface="楷体"/>
+                <a:ea typeface="楷体"/>
+                <a:cs typeface="楷体"/>
+              </a:rPr>
+              <a:t>关注细胞呼吸在酿酒、酸奶、运动生理中的应用。</a:t>
+            </a:r>
+          </a:p>
+        </p:txBody>
+      </p:sp>
+      <p:sp>
+        <p:nvSpPr>
+          <p:cNvPr id="26" name="TextBox 25"/>
+          <p:cNvSpPr txBox="1"/>
+          <p:nvPr/>
+        </p:nvSpPr>
+        <p:spPr>
+          <a:xfrm>
+            <a:off x="11002975" y="6355080"/>
+            <a:ext cx="731520" cy="320040"/>
+          </a:xfrm>
+          <a:prstGeom prst="rect">
+            <a:avLst/>
+          </a:prstGeom>
+          <a:noFill/>
+        </p:spPr>
+        <p:txBody>
+          <a:bodyPr wrap="square" anchor="t" lIns="0" rIns="0" tIns="0" bIns="0">
+            <a:spAutoFit/>
+          </a:bodyPr>
+          <a:lstStyle/>
+          <a:p>
+            <a:pPr algn="r"/>
+            <a:r>
+              <a:rPr sz="1100" b="0">
+                <a:solidFill>
+                  <a:srgbClr val="6B6258"/>
                 </a:solidFill>
                 <a:latin typeface="微软雅黑"/>
                 <a:ea typeface="微软雅黑"/>
                 <a:cs typeface="微软雅黑"/>
               </a:rPr>
-              <a:t>目标</a:t>
-            </a:r>
-          </a:p>
-        </p:txBody>
-      </p:sp>
-      <p:sp>
-        <p:nvSpPr>
-          <p:cNvPr id="24" name="TextBox 23"/>
-          <p:cNvSpPr txBox="1"/>
-          <p:nvPr/>
-        </p:nvSpPr>
-        <p:spPr>
-          <a:xfrm>
-            <a:off x="6995160" y="4251960"/>
-            <a:ext cx="4434840" cy="1417320"/>
-          </a:xfrm>
-          <a:prstGeom prst="rect">
-            <a:avLst/>
-          </a:prstGeom>
-          <a:noFill/>
-        </p:spPr>
-        <p:txBody>
-          <a:bodyPr wrap="square" anchor="t" lIns="0" rIns="0" tIns="0" bIns="0">
-            <a:spAutoFit/>
-          </a:bodyPr>
-          <a:lstStyle/>
-          <a:p>
-            <a:pPr algn="l">
-              <a:lnSpc>
-                <a:spcPct val="128000"/>
-              </a:lnSpc>
-            </a:pPr>
-            <a:r>
-              <a:rPr sz="1400" b="0">
-                <a:solidFill>
-                  <a:srgbClr val="1C2A33"/>
-                </a:solidFill>
-                <a:latin typeface="楷体"/>
-                <a:ea typeface="楷体"/>
-                <a:cs typeface="楷体"/>
-              </a:rPr>
-              <a:t>社会责任：关注细胞呼吸在酿酒、酸奶、运动生理中的应用。</a:t>
-            </a:r>
-          </a:p>
-        </p:txBody>
-      </p:sp>
-      <p:sp>
-        <p:nvSpPr>
-          <p:cNvPr id="25" name="TextBox 24"/>
-          <p:cNvSpPr txBox="1"/>
-          <p:nvPr/>
-        </p:nvSpPr>
-        <p:spPr>
-          <a:xfrm>
-            <a:off x="11002975" y="6355080"/>
-            <a:ext cx="731520" cy="320040"/>
-          </a:xfrm>
-          <a:prstGeom prst="rect">
-            <a:avLst/>
-          </a:prstGeom>
-          <a:noFill/>
-        </p:spPr>
-        <p:txBody>
-          <a:bodyPr wrap="square" anchor="t" lIns="0" rIns="0" tIns="0" bIns="0">
-            <a:spAutoFit/>
-          </a:bodyPr>
-          <a:lstStyle/>
-          <a:p>
-            <a:pPr algn="r"/>
-            <a:r>
-              <a:rPr sz="1100" b="0">
-                <a:solidFill>
-                  <a:srgbClr val="6B6258"/>
-                </a:solidFill>
-                <a:latin typeface="微软雅黑"/>
-                <a:ea typeface="微软雅黑"/>
-                <a:cs typeface="微软雅黑"/>
-              </a:rPr>
-              <a:t>02</a:t>
+              <a:t>29</a:t>
             </a:r>
           </a:p>
         </p:txBody>
@@ -4533,13 +4708,13 @@
             <a:r>
               <a:rPr sz="1300" b="1">
                 <a:solidFill>
-                  <a:srgbClr val="2E7D6B"/>
+                  <a:srgbClr val="B23A2A"/>
                 </a:solidFill>
                 <a:latin typeface="微软雅黑"/>
                 <a:ea typeface="微软雅黑"/>
                 <a:cs typeface="微软雅黑"/>
               </a:rPr>
-              <a:t>课文背景</a:t>
+              <a:t>背景 · 权威调研</a:t>
             </a:r>
           </a:p>
         </p:txBody>
@@ -4559,7 +4734,7 @@
             <a:avLst/>
           </a:prstGeom>
           <a:solidFill>
-            <a:srgbClr val="2E7D6B"/>
+            <a:srgbClr val="B23A2A"/>
           </a:solidFill>
           <a:ln>
             <a:noFill/>
@@ -4596,8 +4771,45 @@
         </p:nvSpPr>
         <p:spPr>
           <a:xfrm>
-            <a:off x="640080" y="1508760"/>
-            <a:ext cx="6766560" cy="4572000"/>
+            <a:off x="640080" y="1737360"/>
+            <a:ext cx="5227167" cy="457200"/>
+          </a:xfrm>
+          <a:prstGeom prst="rect">
+            <a:avLst/>
+          </a:prstGeom>
+          <a:noFill/>
+        </p:spPr>
+        <p:txBody>
+          <a:bodyPr wrap="square" anchor="t" lIns="0" rIns="0" tIns="0" bIns="0">
+            <a:spAutoFit/>
+          </a:bodyPr>
+          <a:lstStyle/>
+          <a:p>
+            <a:pPr algn="l"/>
+            <a:r>
+              <a:rPr sz="1900" b="1">
+                <a:solidFill>
+                  <a:srgbClr val="B23A2A"/>
+                </a:solidFill>
+                <a:latin typeface="楷体"/>
+                <a:ea typeface="楷体"/>
+                <a:cs typeface="楷体"/>
+              </a:rPr>
+              <a:t>教材定位与背景</a:t>
+            </a:r>
+          </a:p>
+        </p:txBody>
+      </p:sp>
+      <p:sp>
+        <p:nvSpPr>
+          <p:cNvPr id="6" name="TextBox 5"/>
+          <p:cNvSpPr txBox="1"/>
+          <p:nvPr/>
+        </p:nvSpPr>
+        <p:spPr>
+          <a:xfrm>
+            <a:off x="640080" y="2240280"/>
+            <a:ext cx="5227167" cy="4206240"/>
           </a:xfrm>
           <a:prstGeom prst="rect">
             <a:avLst/>
@@ -4615,11 +4827,32 @@
                 <a:spcPct val="150000"/>
               </a:lnSpc>
               <a:spcAft>
-                <a:spcPts val="600"/>
+                <a:spcPts val="800"/>
               </a:spcAft>
             </a:pPr>
             <a:r>
-              <a:rPr sz="1600" b="0">
+              <a:rPr sz="1400" b="0">
+                <a:solidFill>
+                  <a:srgbClr val="6B6258"/>
+                </a:solidFill>
+                <a:latin typeface="楷体"/>
+                <a:ea typeface="楷体"/>
+                <a:cs typeface="楷体"/>
+              </a:rPr>
+              <a:t>本单元主题：细胞的能量供应和利用</a:t>
+            </a:r>
+          </a:p>
+          <a:p>
+            <a:pPr algn="l">
+              <a:lnSpc>
+                <a:spcPct val="150000"/>
+              </a:lnSpc>
+              <a:spcAft>
+                <a:spcPts val="800"/>
+              </a:spcAft>
+            </a:pPr>
+            <a:r>
+              <a:rPr sz="1400" b="0">
                 <a:solidFill>
                   <a:srgbClr val="1C2A33"/>
                 </a:solidFill>
@@ -4632,41 +4865,57 @@
           </a:p>
         </p:txBody>
       </p:sp>
-      <p:pic>
-        <p:nvPicPr>
-          <p:cNvPr id="6" name="Picture 5" descr="ricefield.jpg"/>
-          <p:cNvPicPr>
-            <a:picLocks noChangeAspect="1"/>
-          </p:cNvPicPr>
-          <p:nvPr/>
-        </p:nvPicPr>
-        <p:blipFill>
-          <a:blip r:embed="rId2"/>
-          <a:srcRect l="23066" r="23066"/>
-          <a:stretch>
-            <a:fillRect/>
-          </a:stretch>
-        </p:blipFill>
-        <p:spPr>
-          <a:xfrm>
-            <a:off x="8046720" y="1508760"/>
-            <a:ext cx="4114800" cy="3108960"/>
-          </a:xfrm>
-          <a:prstGeom prst="rect">
-            <a:avLst/>
-          </a:prstGeom>
-        </p:spPr>
-      </p:pic>
-      <p:sp>
-        <p:nvSpPr>
-          <p:cNvPr id="7" name="TextBox 6"/>
+      <p:sp>
+        <p:nvSpPr>
+          <p:cNvPr id="7" name="Rounded Rectangle 6"/>
+          <p:cNvSpPr/>
+          <p:nvPr/>
+        </p:nvSpPr>
+        <p:spPr>
+          <a:xfrm>
+            <a:off x="6324447" y="1737360"/>
+            <a:ext cx="5227167" cy="4572000"/>
+          </a:xfrm>
+          <a:prstGeom prst="roundRect">
+            <a:avLst/>
+          </a:prstGeom>
+          <a:solidFill>
+            <a:srgbClr val="1C2A33"/>
+          </a:solidFill>
+          <a:effectLst/>
+        </p:spPr>
+        <p:style>
+          <a:lnRef idx="1">
+            <a:schemeClr val="accent1"/>
+          </a:lnRef>
+          <a:fillRef idx="3">
+            <a:schemeClr val="accent1"/>
+          </a:fillRef>
+          <a:effectRef idx="2">
+            <a:schemeClr val="accent1"/>
+          </a:effectRef>
+          <a:fontRef idx="minor">
+            <a:schemeClr val="lt1"/>
+          </a:fontRef>
+        </p:style>
+        <p:txBody>
+          <a:bodyPr rtlCol="0" anchor="ctr"/>
+          <a:lstStyle/>
+          <a:p>
+            <a:pPr algn="ctr"/>
+          </a:p>
+        </p:txBody>
+      </p:sp>
+      <p:sp>
+        <p:nvSpPr>
+          <p:cNvPr id="8" name="TextBox 7"/>
           <p:cNvSpPr txBox="1"/>
           <p:nvPr/>
         </p:nvSpPr>
         <p:spPr>
           <a:xfrm>
-            <a:off x="8046720" y="4663440"/>
-            <a:ext cx="4114800" cy="365760"/>
+            <a:off x="6598767" y="1874520"/>
+            <a:ext cx="4678527" cy="457200"/>
           </a:xfrm>
           <a:prstGeom prst="rect">
             <a:avLst/>
@@ -4679,24 +4928,131 @@
           </a:bodyPr>
           <a:lstStyle/>
           <a:p>
-            <a:pPr algn="ctr"/>
-            <a:r>
-              <a:rPr sz="1100" b="0">
-                <a:solidFill>
-                  <a:srgbClr val="6B6258"/>
+            <a:pPr algn="l"/>
+            <a:r>
+              <a:rPr sz="1600" b="1">
+                <a:solidFill>
+                  <a:srgbClr val="C8A86B"/>
+                </a:solidFill>
+                <a:latin typeface="楷体"/>
+                <a:ea typeface="楷体"/>
+                <a:cs typeface="楷体"/>
+              </a:rPr>
+              <a:t>权威来源（联网核实）</a:t>
+            </a:r>
+          </a:p>
+        </p:txBody>
+      </p:sp>
+      <p:sp>
+        <p:nvSpPr>
+          <p:cNvPr id="9" name="TextBox 8"/>
+          <p:cNvSpPr txBox="1"/>
+          <p:nvPr/>
+        </p:nvSpPr>
+        <p:spPr>
+          <a:xfrm>
+            <a:off x="6598767" y="2423160"/>
+            <a:ext cx="4678527" cy="3749039"/>
+          </a:xfrm>
+          <a:prstGeom prst="rect">
+            <a:avLst/>
+          </a:prstGeom>
+          <a:noFill/>
+        </p:spPr>
+        <p:txBody>
+          <a:bodyPr wrap="square" anchor="t" lIns="0" rIns="0" tIns="0" bIns="0">
+            <a:spAutoFit/>
+          </a:bodyPr>
+          <a:lstStyle/>
+          <a:p>
+            <a:pPr algn="l">
+              <a:lnSpc>
+                <a:spcPct val="140000"/>
+              </a:lnSpc>
+              <a:spcAft>
+                <a:spcPts val="700"/>
+              </a:spcAft>
+            </a:pPr>
+            <a:r>
+              <a:rPr sz="1250" b="0">
+                <a:solidFill>
+                  <a:srgbClr val="FFFFFF"/>
+                </a:solidFill>
+                <a:latin typeface="楷体"/>
+                <a:ea typeface="楷体"/>
+                <a:cs typeface="楷体"/>
+              </a:rPr>
+              <a:t>· Monash University: The process of aerobic respiration（三阶段场所与产物）</a:t>
+            </a:r>
+          </a:p>
+          <a:p>
+            <a:pPr algn="l">
+              <a:lnSpc>
+                <a:spcPct val="140000"/>
+              </a:lnSpc>
+              <a:spcAft>
+                <a:spcPts val="700"/>
+              </a:spcAft>
+            </a:pPr>
+            <a:r>
+              <a:rPr sz="1250" b="0">
+                <a:solidFill>
+                  <a:srgbClr val="FFFFFF"/>
+                </a:solidFill>
+                <a:latin typeface="楷体"/>
+                <a:ea typeface="楷体"/>
+                <a:cs typeface="楷体"/>
+              </a:rPr>
+              <a:t>· LibreTexts: Cellular Respiration（糖酵解/柠檬酸循环/电子传递链）</a:t>
+            </a:r>
+          </a:p>
+          <a:p>
+            <a:pPr algn="l">
+              <a:lnSpc>
+                <a:spcPct val="140000"/>
+              </a:lnSpc>
+              <a:spcAft>
+                <a:spcPts val="700"/>
+              </a:spcAft>
+            </a:pPr>
+            <a:r>
+              <a:rPr sz="1250" b="0">
+                <a:solidFill>
+                  <a:srgbClr val="FFFFFF"/>
+                </a:solidFill>
+                <a:latin typeface="楷体"/>
+                <a:ea typeface="楷体"/>
+                <a:cs typeface="楷体"/>
+              </a:rPr>
+              <a:t>· 总反应式 C6H12O6+6O2→6CO2+6H2O+能量（教材）</a:t>
+            </a:r>
+          </a:p>
+          <a:p>
+            <a:pPr algn="l">
+              <a:lnSpc>
+                <a:spcPct val="130000"/>
+              </a:lnSpc>
+              <a:spcAft>
+                <a:spcPts val="0"/>
+              </a:spcAft>
+            </a:pPr>
+            <a:r>
+              <a:rPr sz="1150" b="0">
+                <a:solidFill>
+                  <a:srgbClr val="E7DFD2"/>
                 </a:solidFill>
                 <a:latin typeface="微软雅黑"/>
                 <a:ea typeface="微软雅黑"/>
                 <a:cs typeface="微软雅黑"/>
               </a:rPr>
-              <a:t>资料图（自由授权，复用 ricefield.jpg）</a:t>
-            </a:r>
-          </a:p>
-        </p:txBody>
-      </p:sp>
-      <p:sp>
-        <p:nvSpPr>
-          <p:cNvPr id="8" name="TextBox 7"/>
+              <a:t>本课件未使用无关配图</a:t>
+            </a:r>
+          </a:p>
+        </p:txBody>
+      </p:sp>
+      <p:sp>
+        <p:nvSpPr>
+          <p:cNvPr id="10" name="TextBox 9"/>
           <p:cNvSpPr txBox="1"/>
           <p:nvPr/>
         </p:nvSpPr>
@@ -4726,7 +5082,7 @@
                 <a:ea typeface="微软雅黑"/>
                 <a:cs typeface="微软雅黑"/>
               </a:rPr>
-              <a:t>03</a:t>
+              <a:t>30</a:t>
             </a:r>
           </a:p>
         </p:txBody>
@@ -4829,7 +5185,7 @@
                 <a:ea typeface="微软雅黑"/>
                 <a:cs typeface="微软雅黑"/>
               </a:rPr>
-              <a:t>学习重点</a:t>
+              <a:t>重点</a:t>
             </a:r>
           </a:p>
         </p:txBody>
@@ -4880,14 +5236,51 @@
       </p:sp>
       <p:sp>
         <p:nvSpPr>
-          <p:cNvPr id="5" name="Rounded Rectangle 4"/>
+          <p:cNvPr id="5" name="TextBox 4"/>
+          <p:cNvSpPr txBox="1"/>
+          <p:nvPr/>
+        </p:nvSpPr>
+        <p:spPr>
+          <a:xfrm>
+            <a:off x="640080" y="1325880"/>
+            <a:ext cx="10515600" cy="548640"/>
+          </a:xfrm>
+          <a:prstGeom prst="rect">
+            <a:avLst/>
+          </a:prstGeom>
+          <a:noFill/>
+        </p:spPr>
+        <p:txBody>
+          <a:bodyPr wrap="square" anchor="t" lIns="0" rIns="0" tIns="0" bIns="0">
+            <a:spAutoFit/>
+          </a:bodyPr>
+          <a:lstStyle/>
+          <a:p>
+            <a:pPr algn="l"/>
+            <a:r>
+              <a:rPr sz="2600" b="1">
+                <a:solidFill>
+                  <a:srgbClr val="1C2A33"/>
+                </a:solidFill>
+                <a:latin typeface="楷体"/>
+                <a:ea typeface="楷体"/>
+                <a:cs typeface="楷体"/>
+              </a:rPr>
+              <a:t>本课重点</a:t>
+            </a:r>
+          </a:p>
+        </p:txBody>
+      </p:sp>
+      <p:sp>
+        <p:nvSpPr>
+          <p:cNvPr id="6" name="Rounded Rectangle 5"/>
           <p:cNvSpPr/>
           <p:nvPr/>
         </p:nvSpPr>
         <p:spPr>
           <a:xfrm>
-            <a:off x="640080" y="1371600"/>
-            <a:ext cx="10911535" cy="1170432"/>
+            <a:off x="640080" y="2194560"/>
+            <a:ext cx="2453563" cy="3840480"/>
           </a:xfrm>
           <a:prstGeom prst="roundRect">
             <a:avLst/>
@@ -4895,7 +5288,343 @@
           <a:solidFill>
             <a:srgbClr val="FFFFFF"/>
           </a:solidFill>
-          <a:ln w="22860">
+          <a:ln w="20320">
+            <a:solidFill>
+              <a:srgbClr val="B23A2A"/>
+            </a:solidFill>
+          </a:ln>
+          <a:effectLst/>
+        </p:spPr>
+        <p:style>
+          <a:lnRef idx="1">
+            <a:schemeClr val="accent1"/>
+          </a:lnRef>
+          <a:fillRef idx="3">
+            <a:schemeClr val="accent1"/>
+          </a:fillRef>
+          <a:effectRef idx="2">
+            <a:schemeClr val="accent1"/>
+          </a:effectRef>
+          <a:fontRef idx="minor">
+            <a:schemeClr val="lt1"/>
+          </a:fontRef>
+        </p:style>
+        <p:txBody>
+          <a:bodyPr rtlCol="0" anchor="ctr"/>
+          <a:lstStyle/>
+          <a:p>
+            <a:pPr algn="ctr"/>
+          </a:p>
+        </p:txBody>
+      </p:sp>
+      <p:sp>
+        <p:nvSpPr>
+          <p:cNvPr id="7" name="Rectangle 6"/>
+          <p:cNvSpPr/>
+          <p:nvPr/>
+        </p:nvSpPr>
+        <p:spPr>
+          <a:xfrm>
+            <a:off x="640080" y="2194560"/>
+            <a:ext cx="2453563" cy="548640"/>
+          </a:xfrm>
+          <a:prstGeom prst="rect">
+            <a:avLst/>
+          </a:prstGeom>
+          <a:solidFill>
+            <a:srgbClr val="B23A2A"/>
+          </a:solidFill>
+          <a:ln>
+            <a:noFill/>
+          </a:ln>
+          <a:effectLst/>
+        </p:spPr>
+        <p:style>
+          <a:lnRef idx="1">
+            <a:schemeClr val="accent1"/>
+          </a:lnRef>
+          <a:fillRef idx="3">
+            <a:schemeClr val="accent1"/>
+          </a:fillRef>
+          <a:effectRef idx="2">
+            <a:schemeClr val="accent1"/>
+          </a:effectRef>
+          <a:fontRef idx="minor">
+            <a:schemeClr val="lt1"/>
+          </a:fontRef>
+        </p:style>
+        <p:txBody>
+          <a:bodyPr rtlCol="0" anchor="ctr"/>
+          <a:lstStyle/>
+          <a:p>
+            <a:pPr algn="ctr"/>
+          </a:p>
+        </p:txBody>
+      </p:sp>
+      <p:sp>
+        <p:nvSpPr>
+          <p:cNvPr id="8" name="TextBox 7"/>
+          <p:cNvSpPr txBox="1"/>
+          <p:nvPr/>
+        </p:nvSpPr>
+        <p:spPr>
+          <a:xfrm>
+            <a:off x="640080" y="2304288"/>
+            <a:ext cx="2453563" cy="365760"/>
+          </a:xfrm>
+          <a:prstGeom prst="rect">
+            <a:avLst/>
+          </a:prstGeom>
+          <a:noFill/>
+        </p:spPr>
+        <p:txBody>
+          <a:bodyPr wrap="square" anchor="t" lIns="0" rIns="0" tIns="0" bIns="0">
+            <a:spAutoFit/>
+          </a:bodyPr>
+          <a:lstStyle/>
+          <a:p>
+            <a:pPr algn="ctr"/>
+            <a:r>
+              <a:rPr sz="1500" b="1">
+                <a:solidFill>
+                  <a:srgbClr val="FFFFFF"/>
+                </a:solidFill>
+                <a:latin typeface="微软雅黑"/>
+                <a:ea typeface="微软雅黑"/>
+                <a:cs typeface="微软雅黑"/>
+              </a:rPr>
+              <a:t>重点 1</a:t>
+            </a:r>
+          </a:p>
+        </p:txBody>
+      </p:sp>
+      <p:sp>
+        <p:nvSpPr>
+          <p:cNvPr id="9" name="TextBox 8"/>
+          <p:cNvSpPr txBox="1"/>
+          <p:nvPr/>
+        </p:nvSpPr>
+        <p:spPr>
+          <a:xfrm>
+            <a:off x="868680" y="2971800"/>
+            <a:ext cx="1996363" cy="2834640"/>
+          </a:xfrm>
+          <a:prstGeom prst="rect">
+            <a:avLst/>
+          </a:prstGeom>
+          <a:noFill/>
+        </p:spPr>
+        <p:txBody>
+          <a:bodyPr wrap="square" anchor="t" lIns="0" rIns="0" tIns="0" bIns="0">
+            <a:spAutoFit/>
+          </a:bodyPr>
+          <a:lstStyle/>
+          <a:p>
+            <a:pPr algn="l">
+              <a:lnSpc>
+                <a:spcPct val="155000"/>
+              </a:lnSpc>
+            </a:pPr>
+            <a:r>
+              <a:rPr sz="1350" b="0">
+                <a:solidFill>
+                  <a:srgbClr val="1C2A33"/>
+                </a:solidFill>
+                <a:latin typeface="楷体"/>
+                <a:ea typeface="楷体"/>
+                <a:cs typeface="楷体"/>
+              </a:rPr>
+              <a:t>有氧三阶段：Ⅰ糖酵解(质,丙酮酸+[H]+少ATP)；Ⅱ柠檬酸循环(基质,CO2+[H]+少ATP)；Ⅲ电子链(内膜,大量ATP)。</a:t>
+            </a:r>
+          </a:p>
+        </p:txBody>
+      </p:sp>
+      <p:sp>
+        <p:nvSpPr>
+          <p:cNvPr id="10" name="Rounded Rectangle 9"/>
+          <p:cNvSpPr/>
+          <p:nvPr/>
+        </p:nvSpPr>
+        <p:spPr>
+          <a:xfrm>
+            <a:off x="3459403" y="2194560"/>
+            <a:ext cx="2453563" cy="3840480"/>
+          </a:xfrm>
+          <a:prstGeom prst="roundRect">
+            <a:avLst/>
+          </a:prstGeom>
+          <a:solidFill>
+            <a:srgbClr val="FFFFFF"/>
+          </a:solidFill>
+          <a:ln w="20320">
+            <a:solidFill>
+              <a:srgbClr val="2E7D6B"/>
+            </a:solidFill>
+          </a:ln>
+          <a:effectLst/>
+        </p:spPr>
+        <p:style>
+          <a:lnRef idx="1">
+            <a:schemeClr val="accent1"/>
+          </a:lnRef>
+          <a:fillRef idx="3">
+            <a:schemeClr val="accent1"/>
+          </a:fillRef>
+          <a:effectRef idx="2">
+            <a:schemeClr val="accent1"/>
+          </a:effectRef>
+          <a:fontRef idx="minor">
+            <a:schemeClr val="lt1"/>
+          </a:fontRef>
+        </p:style>
+        <p:txBody>
+          <a:bodyPr rtlCol="0" anchor="ctr"/>
+          <a:lstStyle/>
+          <a:p>
+            <a:pPr algn="ctr"/>
+          </a:p>
+        </p:txBody>
+      </p:sp>
+      <p:sp>
+        <p:nvSpPr>
+          <p:cNvPr id="11" name="Rectangle 10"/>
+          <p:cNvSpPr/>
+          <p:nvPr/>
+        </p:nvSpPr>
+        <p:spPr>
+          <a:xfrm>
+            <a:off x="3459403" y="2194560"/>
+            <a:ext cx="2453563" cy="548640"/>
+          </a:xfrm>
+          <a:prstGeom prst="rect">
+            <a:avLst/>
+          </a:prstGeom>
+          <a:solidFill>
+            <a:srgbClr val="2E7D6B"/>
+          </a:solidFill>
+          <a:ln>
+            <a:noFill/>
+          </a:ln>
+          <a:effectLst/>
+        </p:spPr>
+        <p:style>
+          <a:lnRef idx="1">
+            <a:schemeClr val="accent1"/>
+          </a:lnRef>
+          <a:fillRef idx="3">
+            <a:schemeClr val="accent1"/>
+          </a:fillRef>
+          <a:effectRef idx="2">
+            <a:schemeClr val="accent1"/>
+          </a:effectRef>
+          <a:fontRef idx="minor">
+            <a:schemeClr val="lt1"/>
+          </a:fontRef>
+        </p:style>
+        <p:txBody>
+          <a:bodyPr rtlCol="0" anchor="ctr"/>
+          <a:lstStyle/>
+          <a:p>
+            <a:pPr algn="ctr"/>
+          </a:p>
+        </p:txBody>
+      </p:sp>
+      <p:sp>
+        <p:nvSpPr>
+          <p:cNvPr id="12" name="TextBox 11"/>
+          <p:cNvSpPr txBox="1"/>
+          <p:nvPr/>
+        </p:nvSpPr>
+        <p:spPr>
+          <a:xfrm>
+            <a:off x="3459403" y="2304288"/>
+            <a:ext cx="2453563" cy="365760"/>
+          </a:xfrm>
+          <a:prstGeom prst="rect">
+            <a:avLst/>
+          </a:prstGeom>
+          <a:noFill/>
+        </p:spPr>
+        <p:txBody>
+          <a:bodyPr wrap="square" anchor="t" lIns="0" rIns="0" tIns="0" bIns="0">
+            <a:spAutoFit/>
+          </a:bodyPr>
+          <a:lstStyle/>
+          <a:p>
+            <a:pPr algn="ctr"/>
+            <a:r>
+              <a:rPr sz="1500" b="1">
+                <a:solidFill>
+                  <a:srgbClr val="FFFFFF"/>
+                </a:solidFill>
+                <a:latin typeface="微软雅黑"/>
+                <a:ea typeface="微软雅黑"/>
+                <a:cs typeface="微软雅黑"/>
+              </a:rPr>
+              <a:t>重点 2</a:t>
+            </a:r>
+          </a:p>
+        </p:txBody>
+      </p:sp>
+      <p:sp>
+        <p:nvSpPr>
+          <p:cNvPr id="13" name="TextBox 12"/>
+          <p:cNvSpPr txBox="1"/>
+          <p:nvPr/>
+        </p:nvSpPr>
+        <p:spPr>
+          <a:xfrm>
+            <a:off x="3688003" y="2971800"/>
+            <a:ext cx="1996363" cy="2834640"/>
+          </a:xfrm>
+          <a:prstGeom prst="rect">
+            <a:avLst/>
+          </a:prstGeom>
+          <a:noFill/>
+        </p:spPr>
+        <p:txBody>
+          <a:bodyPr wrap="square" anchor="t" lIns="0" rIns="0" tIns="0" bIns="0">
+            <a:spAutoFit/>
+          </a:bodyPr>
+          <a:lstStyle/>
+          <a:p>
+            <a:pPr algn="l">
+              <a:lnSpc>
+                <a:spcPct val="155000"/>
+              </a:lnSpc>
+            </a:pPr>
+            <a:r>
+              <a:rPr sz="1350" b="0">
+                <a:solidFill>
+                  <a:srgbClr val="1C2A33"/>
+                </a:solidFill>
+                <a:latin typeface="楷体"/>
+                <a:ea typeface="楷体"/>
+                <a:cs typeface="楷体"/>
+              </a:rPr>
+              <a:t>总式：C6H12O6+6O2→6CO2+6H2O+能量。</a:t>
+            </a:r>
+          </a:p>
+        </p:txBody>
+      </p:sp>
+      <p:sp>
+        <p:nvSpPr>
+          <p:cNvPr id="14" name="Rounded Rectangle 13"/>
+          <p:cNvSpPr/>
+          <p:nvPr/>
+        </p:nvSpPr>
+        <p:spPr>
+          <a:xfrm>
+            <a:off x="6278727" y="2194560"/>
+            <a:ext cx="2453563" cy="3840480"/>
+          </a:xfrm>
+          <a:prstGeom prst="roundRect">
+            <a:avLst/>
+          </a:prstGeom>
+          <a:solidFill>
+            <a:srgbClr val="FFFFFF"/>
+          </a:solidFill>
+          <a:ln w="20320">
             <a:solidFill>
               <a:srgbClr val="C8A86B"/>
             </a:solidFill>
@@ -4926,107 +5655,23 @@
       </p:sp>
       <p:sp>
         <p:nvSpPr>
-          <p:cNvPr id="6" name="TextBox 5"/>
-          <p:cNvSpPr txBox="1"/>
-          <p:nvPr/>
-        </p:nvSpPr>
-        <p:spPr>
-          <a:xfrm>
-            <a:off x="1371600" y="1481328"/>
-            <a:ext cx="9997135" cy="457200"/>
-          </a:xfrm>
-          <a:prstGeom prst="rect">
-            <a:avLst/>
-          </a:prstGeom>
-          <a:noFill/>
-        </p:spPr>
-        <p:txBody>
-          <a:bodyPr wrap="square" anchor="t" lIns="0" rIns="0" tIns="0" bIns="0">
-            <a:spAutoFit/>
-          </a:bodyPr>
-          <a:lstStyle/>
-          <a:p>
-            <a:pPr algn="l">
-              <a:lnSpc>
-                <a:spcPct val="110000"/>
-              </a:lnSpc>
-            </a:pPr>
-            <a:r>
-              <a:rPr sz="1600" b="1">
-                <a:solidFill>
-                  <a:srgbClr val="1C2A33"/>
-                </a:solidFill>
-                <a:latin typeface="微软雅黑"/>
-                <a:ea typeface="微软雅黑"/>
-                <a:cs typeface="微软雅黑"/>
-              </a:rPr>
-              <a:t/>
-            </a:r>
-          </a:p>
-        </p:txBody>
-      </p:sp>
-      <p:sp>
-        <p:nvSpPr>
-          <p:cNvPr id="7" name="TextBox 6"/>
-          <p:cNvSpPr txBox="1"/>
-          <p:nvPr/>
-        </p:nvSpPr>
-        <p:spPr>
-          <a:xfrm>
-            <a:off x="1371600" y="1920240"/>
-            <a:ext cx="9997135" cy="530352"/>
-          </a:xfrm>
-          <a:prstGeom prst="rect">
-            <a:avLst/>
-          </a:prstGeom>
-          <a:noFill/>
-        </p:spPr>
-        <p:txBody>
-          <a:bodyPr wrap="square" anchor="t" lIns="0" rIns="0" tIns="0" bIns="0">
-            <a:spAutoFit/>
-          </a:bodyPr>
-          <a:lstStyle/>
-          <a:p>
-            <a:pPr algn="l">
-              <a:lnSpc>
-                <a:spcPct val="128000"/>
-              </a:lnSpc>
-            </a:pPr>
-            <a:r>
-              <a:rPr sz="1100" b="0">
-                <a:solidFill>
-                  <a:srgbClr val="1C2A33"/>
-                </a:solidFill>
-                <a:latin typeface="楷体"/>
-                <a:ea typeface="楷体"/>
-                <a:cs typeface="楷体"/>
-              </a:rPr>
-              <a:t>① 有氧三阶段：Ⅰ糖酵解(质,丙酮酸+[H]+少ATP)；Ⅱ柠檬酸循环(基质,CO2+[H]+少ATP)；Ⅲ电子链(内膜,大量ATP)。</a:t>
-            </a:r>
-          </a:p>
-        </p:txBody>
-      </p:sp>
-      <p:sp>
-        <p:nvSpPr>
-          <p:cNvPr id="8" name="Rounded Rectangle 7"/>
+          <p:cNvPr id="15" name="Rectangle 14"/>
           <p:cNvSpPr/>
           <p:nvPr/>
         </p:nvSpPr>
         <p:spPr>
           <a:xfrm>
-            <a:off x="640080" y="2651760"/>
-            <a:ext cx="10911535" cy="1170432"/>
-          </a:xfrm>
-          <a:prstGeom prst="roundRect">
+            <a:off x="6278727" y="2194560"/>
+            <a:ext cx="2453563" cy="548640"/>
+          </a:xfrm>
+          <a:prstGeom prst="rect">
             <a:avLst/>
           </a:prstGeom>
           <a:solidFill>
-            <a:srgbClr val="FFFFFF"/>
+            <a:srgbClr val="C8A86B"/>
           </a:solidFill>
-          <a:ln w="22860">
-            <a:solidFill>
-              <a:srgbClr val="C8A86B"/>
-            </a:solidFill>
+          <a:ln>
+            <a:noFill/>
           </a:ln>
           <a:effectLst/>
         </p:spPr>
@@ -5054,14 +5699,14 @@
       </p:sp>
       <p:sp>
         <p:nvSpPr>
-          <p:cNvPr id="9" name="TextBox 8"/>
+          <p:cNvPr id="16" name="TextBox 15"/>
           <p:cNvSpPr txBox="1"/>
           <p:nvPr/>
         </p:nvSpPr>
         <p:spPr>
           <a:xfrm>
-            <a:off x="1371600" y="2761488"/>
-            <a:ext cx="9997135" cy="457200"/>
+            <a:off x="6278727" y="2304288"/>
+            <a:ext cx="2453563" cy="365760"/>
           </a:xfrm>
           <a:prstGeom prst="rect">
             <a:avLst/>
@@ -5074,35 +5719,31 @@
           </a:bodyPr>
           <a:lstStyle/>
           <a:p>
-            <a:pPr algn="l">
-              <a:lnSpc>
-                <a:spcPct val="110000"/>
-              </a:lnSpc>
-            </a:pPr>
-            <a:r>
-              <a:rPr sz="1600" b="1">
-                <a:solidFill>
-                  <a:srgbClr val="1C2A33"/>
+            <a:pPr algn="ctr"/>
+            <a:r>
+              <a:rPr sz="1500" b="1">
+                <a:solidFill>
+                  <a:srgbClr val="FFFFFF"/>
                 </a:solidFill>
                 <a:latin typeface="微软雅黑"/>
                 <a:ea typeface="微软雅黑"/>
                 <a:cs typeface="微软雅黑"/>
               </a:rPr>
-              <a:t/>
-            </a:r>
-          </a:p>
-        </p:txBody>
-      </p:sp>
-      <p:sp>
-        <p:nvSpPr>
-          <p:cNvPr id="10" name="TextBox 9"/>
+              <a:t>重点 3</a:t>
+            </a:r>
+          </a:p>
+        </p:txBody>
+      </p:sp>
+      <p:sp>
+        <p:nvSpPr>
+          <p:cNvPr id="17" name="TextBox 16"/>
           <p:cNvSpPr txBox="1"/>
           <p:nvPr/>
         </p:nvSpPr>
         <p:spPr>
           <a:xfrm>
-            <a:off x="1371600" y="3200400"/>
-            <a:ext cx="9997135" cy="530352"/>
+            <a:off x="6507327" y="2971800"/>
+            <a:ext cx="1996363" cy="2834640"/>
           </a:xfrm>
           <a:prstGeom prst="rect">
             <a:avLst/>
@@ -5117,11 +5758,11 @@
           <a:p>
             <a:pPr algn="l">
               <a:lnSpc>
-                <a:spcPct val="128000"/>
+                <a:spcPct val="155000"/>
               </a:lnSpc>
             </a:pPr>
             <a:r>
-              <a:rPr sz="1300" b="0">
+              <a:rPr sz="1350" b="0">
                 <a:solidFill>
                   <a:srgbClr val="1C2A33"/>
                 </a:solidFill>
@@ -5129,21 +5770,21 @@
                 <a:ea typeface="楷体"/>
                 <a:cs typeface="楷体"/>
               </a:rPr>
-              <a:t>② 总式：C6H12O6+6O2→6CO2+6H2O+能量。</a:t>
-            </a:r>
-          </a:p>
-        </p:txBody>
-      </p:sp>
-      <p:sp>
-        <p:nvSpPr>
-          <p:cNvPr id="11" name="Rounded Rectangle 10"/>
+              <a:t>无氧：酒精发酵(植物/酵母)、乳酸发酵(动物/乳酸菌)，只Ⅰ阶段产ATP。</a:t>
+            </a:r>
+          </a:p>
+        </p:txBody>
+      </p:sp>
+      <p:sp>
+        <p:nvSpPr>
+          <p:cNvPr id="18" name="Rounded Rectangle 17"/>
           <p:cNvSpPr/>
           <p:nvPr/>
         </p:nvSpPr>
         <p:spPr>
           <a:xfrm>
-            <a:off x="640080" y="3931920"/>
-            <a:ext cx="10911535" cy="1170432"/>
+            <a:off x="9098051" y="2194560"/>
+            <a:ext cx="2453563" cy="3840480"/>
           </a:xfrm>
           <a:prstGeom prst="roundRect">
             <a:avLst/>
@@ -5151,9 +5792,9 @@
           <a:solidFill>
             <a:srgbClr val="FFFFFF"/>
           </a:solidFill>
-          <a:ln w="22860">
+          <a:ln w="20320">
             <a:solidFill>
-              <a:srgbClr val="C8A86B"/>
+              <a:srgbClr val="6B6258"/>
             </a:solidFill>
           </a:ln>
           <a:effectLst/>
@@ -5182,107 +5823,23 @@
       </p:sp>
       <p:sp>
         <p:nvSpPr>
-          <p:cNvPr id="12" name="TextBox 11"/>
-          <p:cNvSpPr txBox="1"/>
-          <p:nvPr/>
-        </p:nvSpPr>
-        <p:spPr>
-          <a:xfrm>
-            <a:off x="1371600" y="4041648"/>
-            <a:ext cx="9997135" cy="457200"/>
-          </a:xfrm>
-          <a:prstGeom prst="rect">
-            <a:avLst/>
-          </a:prstGeom>
-          <a:noFill/>
-        </p:spPr>
-        <p:txBody>
-          <a:bodyPr wrap="square" anchor="t" lIns="0" rIns="0" tIns="0" bIns="0">
-            <a:spAutoFit/>
-          </a:bodyPr>
-          <a:lstStyle/>
-          <a:p>
-            <a:pPr algn="l">
-              <a:lnSpc>
-                <a:spcPct val="110000"/>
-              </a:lnSpc>
-            </a:pPr>
-            <a:r>
-              <a:rPr sz="1600" b="1">
-                <a:solidFill>
-                  <a:srgbClr val="1C2A33"/>
-                </a:solidFill>
-                <a:latin typeface="微软雅黑"/>
-                <a:ea typeface="微软雅黑"/>
-                <a:cs typeface="微软雅黑"/>
-              </a:rPr>
-              <a:t/>
-            </a:r>
-          </a:p>
-        </p:txBody>
-      </p:sp>
-      <p:sp>
-        <p:nvSpPr>
-          <p:cNvPr id="13" name="TextBox 12"/>
-          <p:cNvSpPr txBox="1"/>
-          <p:nvPr/>
-        </p:nvSpPr>
-        <p:spPr>
-          <a:xfrm>
-            <a:off x="1371600" y="4480560"/>
-            <a:ext cx="9997135" cy="530352"/>
-          </a:xfrm>
-          <a:prstGeom prst="rect">
-            <a:avLst/>
-          </a:prstGeom>
-          <a:noFill/>
-        </p:spPr>
-        <p:txBody>
-          <a:bodyPr wrap="square" anchor="t" lIns="0" rIns="0" tIns="0" bIns="0">
-            <a:spAutoFit/>
-          </a:bodyPr>
-          <a:lstStyle/>
-          <a:p>
-            <a:pPr algn="l">
-              <a:lnSpc>
-                <a:spcPct val="128000"/>
-              </a:lnSpc>
-            </a:pPr>
-            <a:r>
-              <a:rPr sz="1300" b="0">
-                <a:solidFill>
-                  <a:srgbClr val="1C2A33"/>
-                </a:solidFill>
-                <a:latin typeface="楷体"/>
-                <a:ea typeface="楷体"/>
-                <a:cs typeface="楷体"/>
-              </a:rPr>
-              <a:t>③ 无氧：酒精发酵(植物/酵母)、乳酸发酵(动物/乳酸菌)，只Ⅰ阶段产ATP。</a:t>
-            </a:r>
-          </a:p>
-        </p:txBody>
-      </p:sp>
-      <p:sp>
-        <p:nvSpPr>
-          <p:cNvPr id="14" name="Rounded Rectangle 13"/>
+          <p:cNvPr id="19" name="Rectangle 18"/>
           <p:cNvSpPr/>
           <p:nvPr/>
         </p:nvSpPr>
         <p:spPr>
           <a:xfrm>
-            <a:off x="640080" y="5212080"/>
-            <a:ext cx="10911535" cy="1170432"/>
-          </a:xfrm>
-          <a:prstGeom prst="roundRect">
+            <a:off x="9098051" y="2194560"/>
+            <a:ext cx="2453563" cy="548640"/>
+          </a:xfrm>
+          <a:prstGeom prst="rect">
             <a:avLst/>
           </a:prstGeom>
           <a:solidFill>
-            <a:srgbClr val="FFFFFF"/>
+            <a:srgbClr val="6B6258"/>
           </a:solidFill>
-          <a:ln w="22860">
-            <a:solidFill>
-              <a:srgbClr val="C8A86B"/>
-            </a:solidFill>
+          <a:ln>
+            <a:noFill/>
           </a:ln>
           <a:effectLst/>
         </p:spPr>
@@ -5310,14 +5867,14 @@
       </p:sp>
       <p:sp>
         <p:nvSpPr>
-          <p:cNvPr id="15" name="TextBox 14"/>
+          <p:cNvPr id="20" name="TextBox 19"/>
           <p:cNvSpPr txBox="1"/>
           <p:nvPr/>
         </p:nvSpPr>
         <p:spPr>
           <a:xfrm>
-            <a:off x="1371600" y="5321808"/>
-            <a:ext cx="9997135" cy="457200"/>
+            <a:off x="9098051" y="2304288"/>
+            <a:ext cx="2453563" cy="365760"/>
           </a:xfrm>
           <a:prstGeom prst="rect">
             <a:avLst/>
@@ -5330,35 +5887,31 @@
           </a:bodyPr>
           <a:lstStyle/>
           <a:p>
-            <a:pPr algn="l">
-              <a:lnSpc>
-                <a:spcPct val="110000"/>
-              </a:lnSpc>
-            </a:pPr>
-            <a:r>
-              <a:rPr sz="1600" b="1">
-                <a:solidFill>
-                  <a:srgbClr val="1C2A33"/>
+            <a:pPr algn="ctr"/>
+            <a:r>
+              <a:rPr sz="1500" b="1">
+                <a:solidFill>
+                  <a:srgbClr val="FFFFFF"/>
                 </a:solidFill>
                 <a:latin typeface="微软雅黑"/>
                 <a:ea typeface="微软雅黑"/>
                 <a:cs typeface="微软雅黑"/>
               </a:rPr>
-              <a:t/>
-            </a:r>
-          </a:p>
-        </p:txBody>
-      </p:sp>
-      <p:sp>
-        <p:nvSpPr>
-          <p:cNvPr id="16" name="TextBox 15"/>
+              <a:t>重点 4</a:t>
+            </a:r>
+          </a:p>
+        </p:txBody>
+      </p:sp>
+      <p:sp>
+        <p:nvSpPr>
+          <p:cNvPr id="21" name="TextBox 20"/>
           <p:cNvSpPr txBox="1"/>
           <p:nvPr/>
         </p:nvSpPr>
         <p:spPr>
           <a:xfrm>
-            <a:off x="1371600" y="5760720"/>
-            <a:ext cx="9997135" cy="530352"/>
+            <a:off x="9326651" y="2971800"/>
+            <a:ext cx="1996363" cy="2834640"/>
           </a:xfrm>
           <a:prstGeom prst="rect">
             <a:avLst/>
@@ -5373,11 +5926,11 @@
           <a:p>
             <a:pPr algn="l">
               <a:lnSpc>
-                <a:spcPct val="128000"/>
+                <a:spcPct val="155000"/>
               </a:lnSpc>
             </a:pPr>
             <a:r>
-              <a:rPr sz="1300" b="0">
+              <a:rPr sz="1350" b="0">
                 <a:solidFill>
                   <a:srgbClr val="1C2A33"/>
                 </a:solidFill>
@@ -5385,14 +5938,14 @@
                 <a:ea typeface="楷体"/>
                 <a:cs typeface="楷体"/>
               </a:rPr>
-              <a:t>④ 有氧释放能量多，无氧少。</a:t>
-            </a:r>
-          </a:p>
-        </p:txBody>
-      </p:sp>
-      <p:sp>
-        <p:nvSpPr>
-          <p:cNvPr id="17" name="TextBox 16"/>
+              <a:t>有氧释放能量多，无氧少。</a:t>
+            </a:r>
+          </a:p>
+        </p:txBody>
+      </p:sp>
+      <p:sp>
+        <p:nvSpPr>
+          <p:cNvPr id="22" name="TextBox 21"/>
           <p:cNvSpPr txBox="1"/>
           <p:nvPr/>
         </p:nvSpPr>
@@ -5422,7 +5975,7 @@
                 <a:ea typeface="微软雅黑"/>
                 <a:cs typeface="微软雅黑"/>
               </a:rPr>
-              <a:t>04</a:t>
+              <a:t>31</a:t>
             </a:r>
           </a:p>
         </p:txBody>
@@ -5519,13 +6072,13 @@
             <a:r>
               <a:rPr sz="1300" b="1">
                 <a:solidFill>
-                  <a:srgbClr val="2E7D6B"/>
+                  <a:srgbClr val="B23A2A"/>
                 </a:solidFill>
                 <a:latin typeface="微软雅黑"/>
                 <a:ea typeface="微软雅黑"/>
                 <a:cs typeface="微软雅黑"/>
               </a:rPr>
-              <a:t>学习路径</a:t>
+              <a:t>方法</a:t>
             </a:r>
           </a:p>
         </p:txBody>
@@ -5545,7 +6098,7 @@
             <a:avLst/>
           </a:prstGeom>
           <a:solidFill>
-            <a:srgbClr val="2E7D6B"/>
+            <a:srgbClr val="B23A2A"/>
           </a:solidFill>
           <a:ln>
             <a:noFill/>
@@ -5576,14 +6129,256 @@
       </p:sp>
       <p:sp>
         <p:nvSpPr>
-          <p:cNvPr id="5" name="Rounded Rectangle 4"/>
+          <p:cNvPr id="5" name="TextBox 4"/>
+          <p:cNvSpPr txBox="1"/>
+          <p:nvPr/>
+        </p:nvSpPr>
+        <p:spPr>
+          <a:xfrm>
+            <a:off x="640080" y="1325880"/>
+            <a:ext cx="10515600" cy="548640"/>
+          </a:xfrm>
+          <a:prstGeom prst="rect">
+            <a:avLst/>
+          </a:prstGeom>
+          <a:noFill/>
+        </p:spPr>
+        <p:txBody>
+          <a:bodyPr wrap="square" anchor="t" lIns="0" rIns="0" tIns="0" bIns="0">
+            <a:spAutoFit/>
+          </a:bodyPr>
+          <a:lstStyle/>
+          <a:p>
+            <a:pPr algn="l"/>
+            <a:r>
+              <a:rPr sz="2600" b="1">
+                <a:solidFill>
+                  <a:srgbClr val="1C2A33"/>
+                </a:solidFill>
+                <a:latin typeface="楷体"/>
+                <a:ea typeface="楷体"/>
+                <a:cs typeface="楷体"/>
+              </a:rPr>
+              <a:t>学习路径与方法</a:t>
+            </a:r>
+          </a:p>
+        </p:txBody>
+      </p:sp>
+      <p:sp>
+        <p:nvSpPr>
+          <p:cNvPr id="6" name="Rounded Rectangle 5"/>
           <p:cNvSpPr/>
           <p:nvPr/>
         </p:nvSpPr>
         <p:spPr>
           <a:xfrm>
-            <a:off x="640080" y="1371600"/>
-            <a:ext cx="10911535" cy="685800"/>
+            <a:off x="640080" y="2194560"/>
+            <a:ext cx="2453563" cy="3840480"/>
+          </a:xfrm>
+          <a:prstGeom prst="roundRect">
+            <a:avLst/>
+          </a:prstGeom>
+          <a:solidFill>
+            <a:srgbClr val="FFFFFF"/>
+          </a:solidFill>
+          <a:ln w="22860">
+            <a:solidFill>
+              <a:srgbClr val="B23A2A"/>
+            </a:solidFill>
+          </a:ln>
+          <a:effectLst/>
+        </p:spPr>
+        <p:style>
+          <a:lnRef idx="1">
+            <a:schemeClr val="accent1"/>
+          </a:lnRef>
+          <a:fillRef idx="3">
+            <a:schemeClr val="accent1"/>
+          </a:fillRef>
+          <a:effectRef idx="2">
+            <a:schemeClr val="accent1"/>
+          </a:effectRef>
+          <a:fontRef idx="minor">
+            <a:schemeClr val="lt1"/>
+          </a:fontRef>
+        </p:style>
+        <p:txBody>
+          <a:bodyPr rtlCol="0" anchor="ctr"/>
+          <a:lstStyle/>
+          <a:p>
+            <a:pPr algn="ctr"/>
+          </a:p>
+        </p:txBody>
+      </p:sp>
+      <p:sp>
+        <p:nvSpPr>
+          <p:cNvPr id="7" name="Oval 6"/>
+          <p:cNvSpPr/>
+          <p:nvPr/>
+        </p:nvSpPr>
+        <p:spPr>
+          <a:xfrm>
+            <a:off x="841248" y="2423160"/>
+            <a:ext cx="548640" cy="548640"/>
+          </a:xfrm>
+          <a:prstGeom prst="ellipse">
+            <a:avLst/>
+          </a:prstGeom>
+          <a:solidFill>
+            <a:srgbClr val="B23A2A"/>
+          </a:solidFill>
+          <a:ln>
+            <a:noFill/>
+          </a:ln>
+          <a:effectLst/>
+        </p:spPr>
+        <p:style>
+          <a:lnRef idx="1">
+            <a:schemeClr val="accent1"/>
+          </a:lnRef>
+          <a:fillRef idx="3">
+            <a:schemeClr val="accent1"/>
+          </a:fillRef>
+          <a:effectRef idx="2">
+            <a:schemeClr val="accent1"/>
+          </a:effectRef>
+          <a:fontRef idx="minor">
+            <a:schemeClr val="lt1"/>
+          </a:fontRef>
+        </p:style>
+        <p:txBody>
+          <a:bodyPr rtlCol="0" anchor="ctr"/>
+          <a:lstStyle/>
+          <a:p>
+            <a:pPr algn="ctr"/>
+          </a:p>
+        </p:txBody>
+      </p:sp>
+      <p:sp>
+        <p:nvSpPr>
+          <p:cNvPr id="8" name="TextBox 7"/>
+          <p:cNvSpPr txBox="1"/>
+          <p:nvPr/>
+        </p:nvSpPr>
+        <p:spPr>
+          <a:xfrm>
+            <a:off x="841248" y="2487168"/>
+            <a:ext cx="548640" cy="411480"/>
+          </a:xfrm>
+          <a:prstGeom prst="rect">
+            <a:avLst/>
+          </a:prstGeom>
+          <a:noFill/>
+        </p:spPr>
+        <p:txBody>
+          <a:bodyPr wrap="square" anchor="t" lIns="0" rIns="0" tIns="0" bIns="0">
+            <a:spAutoFit/>
+          </a:bodyPr>
+          <a:lstStyle/>
+          <a:p>
+            <a:pPr algn="ctr"/>
+            <a:r>
+              <a:rPr sz="2000" b="1">
+                <a:solidFill>
+                  <a:srgbClr val="FFFFFF"/>
+                </a:solidFill>
+                <a:latin typeface="微软雅黑"/>
+                <a:ea typeface="微软雅黑"/>
+                <a:cs typeface="微软雅黑"/>
+              </a:rPr>
+              <a:t>1</a:t>
+            </a:r>
+          </a:p>
+        </p:txBody>
+      </p:sp>
+      <p:sp>
+        <p:nvSpPr>
+          <p:cNvPr id="9" name="TextBox 8"/>
+          <p:cNvSpPr txBox="1"/>
+          <p:nvPr/>
+        </p:nvSpPr>
+        <p:spPr>
+          <a:xfrm>
+            <a:off x="1554480" y="2450592"/>
+            <a:ext cx="1356283" cy="548640"/>
+          </a:xfrm>
+          <a:prstGeom prst="rect">
+            <a:avLst/>
+          </a:prstGeom>
+          <a:noFill/>
+        </p:spPr>
+        <p:txBody>
+          <a:bodyPr wrap="square" anchor="t" lIns="0" rIns="0" tIns="0" bIns="0">
+            <a:spAutoFit/>
+          </a:bodyPr>
+          <a:lstStyle/>
+          <a:p>
+            <a:pPr algn="l"/>
+            <a:r>
+              <a:rPr sz="1600" b="1">
+                <a:solidFill>
+                  <a:srgbClr val="B23A2A"/>
+                </a:solidFill>
+                <a:latin typeface="楷体"/>
+                <a:ea typeface="楷体"/>
+                <a:cs typeface="楷体"/>
+              </a:rPr>
+              <a:t>方法</a:t>
+            </a:r>
+          </a:p>
+        </p:txBody>
+      </p:sp>
+      <p:sp>
+        <p:nvSpPr>
+          <p:cNvPr id="10" name="TextBox 9"/>
+          <p:cNvSpPr txBox="1"/>
+          <p:nvPr/>
+        </p:nvSpPr>
+        <p:spPr>
+          <a:xfrm>
+            <a:off x="868680" y="3200400"/>
+            <a:ext cx="1996363" cy="2651760"/>
+          </a:xfrm>
+          <a:prstGeom prst="rect">
+            <a:avLst/>
+          </a:prstGeom>
+          <a:noFill/>
+        </p:spPr>
+        <p:txBody>
+          <a:bodyPr wrap="square" anchor="t" lIns="0" rIns="0" tIns="0" bIns="0">
+            <a:spAutoFit/>
+          </a:bodyPr>
+          <a:lstStyle/>
+          <a:p>
+            <a:pPr algn="l">
+              <a:lnSpc>
+                <a:spcPct val="155000"/>
+              </a:lnSpc>
+            </a:pPr>
+            <a:r>
+              <a:rPr sz="1350" b="0">
+                <a:solidFill>
+                  <a:srgbClr val="1C2A33"/>
+                </a:solidFill>
+                <a:latin typeface="楷体"/>
+                <a:ea typeface="楷体"/>
+                <a:cs typeface="楷体"/>
+              </a:rPr>
+              <a:t>阶段图解法(三阶段)。</a:t>
+            </a:r>
+          </a:p>
+        </p:txBody>
+      </p:sp>
+      <p:sp>
+        <p:nvSpPr>
+          <p:cNvPr id="11" name="Rounded Rectangle 10"/>
+          <p:cNvSpPr/>
+          <p:nvPr/>
+        </p:nvSpPr>
+        <p:spPr>
+          <a:xfrm>
+            <a:off x="3459403" y="2194560"/>
+            <a:ext cx="2453563" cy="3840480"/>
           </a:xfrm>
           <a:prstGeom prst="roundRect">
             <a:avLst/>
@@ -5622,14 +6417,14 @@
       </p:sp>
       <p:sp>
         <p:nvSpPr>
-          <p:cNvPr id="6" name="Oval 5"/>
+          <p:cNvPr id="12" name="Oval 11"/>
           <p:cNvSpPr/>
           <p:nvPr/>
         </p:nvSpPr>
         <p:spPr>
           <a:xfrm>
-            <a:off x="804672" y="1536192"/>
-            <a:ext cx="457200" cy="457200"/>
+            <a:off x="3660571" y="2423160"/>
+            <a:ext cx="548640" cy="548640"/>
           </a:xfrm>
           <a:prstGeom prst="ellipse">
             <a:avLst/>
@@ -5666,14 +6461,14 @@
       </p:sp>
       <p:sp>
         <p:nvSpPr>
-          <p:cNvPr id="7" name="TextBox 6"/>
+          <p:cNvPr id="13" name="TextBox 12"/>
           <p:cNvSpPr txBox="1"/>
           <p:nvPr/>
         </p:nvSpPr>
         <p:spPr>
           <a:xfrm>
-            <a:off x="804672" y="1591056"/>
-            <a:ext cx="457200" cy="384048"/>
+            <a:off x="3660571" y="2487168"/>
+            <a:ext cx="548640" cy="411480"/>
           </a:xfrm>
           <a:prstGeom prst="rect">
             <a:avLst/>
@@ -5688,7 +6483,7 @@
           <a:p>
             <a:pPr algn="ctr"/>
             <a:r>
-              <a:rPr sz="1600" b="1">
+              <a:rPr sz="2000" b="1">
                 <a:solidFill>
                   <a:srgbClr val="FFFFFF"/>
                 </a:solidFill>
@@ -5696,21 +6491,21 @@
                 <a:ea typeface="微软雅黑"/>
                 <a:cs typeface="微软雅黑"/>
               </a:rPr>
-              <a:t>1</a:t>
-            </a:r>
-          </a:p>
-        </p:txBody>
-      </p:sp>
-      <p:sp>
-        <p:nvSpPr>
-          <p:cNvPr id="8" name="TextBox 7"/>
+              <a:t>2</a:t>
+            </a:r>
+          </a:p>
+        </p:txBody>
+      </p:sp>
+      <p:sp>
+        <p:nvSpPr>
+          <p:cNvPr id="14" name="TextBox 13"/>
           <p:cNvSpPr txBox="1"/>
           <p:nvPr/>
         </p:nvSpPr>
         <p:spPr>
           <a:xfrm>
-            <a:off x="1371600" y="1481328"/>
-            <a:ext cx="9997135" cy="484632"/>
+            <a:off x="4373803" y="2450592"/>
+            <a:ext cx="1356283" cy="548640"/>
           </a:xfrm>
           <a:prstGeom prst="rect">
             <a:avLst/>
@@ -5723,35 +6518,72 @@
           </a:bodyPr>
           <a:lstStyle/>
           <a:p>
+            <a:pPr algn="l"/>
+            <a:r>
+              <a:rPr sz="1600" b="1">
+                <a:solidFill>
+                  <a:srgbClr val="2E7D6B"/>
+                </a:solidFill>
+                <a:latin typeface="楷体"/>
+                <a:ea typeface="楷体"/>
+                <a:cs typeface="楷体"/>
+              </a:rPr>
+              <a:t>方法</a:t>
+            </a:r>
+          </a:p>
+        </p:txBody>
+      </p:sp>
+      <p:sp>
+        <p:nvSpPr>
+          <p:cNvPr id="15" name="TextBox 14"/>
+          <p:cNvSpPr txBox="1"/>
+          <p:nvPr/>
+        </p:nvSpPr>
+        <p:spPr>
+          <a:xfrm>
+            <a:off x="3688003" y="3200400"/>
+            <a:ext cx="1996363" cy="2651760"/>
+          </a:xfrm>
+          <a:prstGeom prst="rect">
+            <a:avLst/>
+          </a:prstGeom>
+          <a:noFill/>
+        </p:spPr>
+        <p:txBody>
+          <a:bodyPr wrap="square" anchor="t" lIns="0" rIns="0" tIns="0" bIns="0">
+            <a:spAutoFit/>
+          </a:bodyPr>
+          <a:lstStyle/>
+          <a:p>
             <a:pPr algn="l">
               <a:lnSpc>
-                <a:spcPct val="110000"/>
+                <a:spcPct val="155000"/>
               </a:lnSpc>
             </a:pPr>
             <a:r>
-              <a:rPr sz="1600" b="1">
+              <a:rPr sz="1350" b="0">
                 <a:solidFill>
                   <a:srgbClr val="1C2A33"/>
                 </a:solidFill>
-                <a:latin typeface="微软雅黑"/>
-                <a:ea typeface="微软雅黑"/>
-                <a:cs typeface="微软雅黑"/>
+                <a:latin typeface="楷体"/>
+                <a:ea typeface="楷体"/>
+                <a:cs typeface="楷体"/>
               </a:rPr>
-              <a:t>Step 1 导入</a:t>
-            </a:r>
-          </a:p>
-        </p:txBody>
-      </p:sp>
-      <p:sp>
-        <p:nvSpPr>
-          <p:cNvPr id="9" name="Rounded Rectangle 8"/>
+              <a:t>对比表法(有氧/无氧)。</a:t>
+            </a:r>
+          </a:p>
+        </p:txBody>
+      </p:sp>
+      <p:sp>
+        <p:nvSpPr>
+          <p:cNvPr id="16" name="Rounded Rectangle 15"/>
           <p:cNvSpPr/>
           <p:nvPr/>
         </p:nvSpPr>
         <p:spPr>
           <a:xfrm>
-            <a:off x="640080" y="2194560"/>
-            <a:ext cx="10911535" cy="685800"/>
+            <a:off x="6278727" y="2194560"/>
+            <a:ext cx="2453563" cy="3840480"/>
           </a:xfrm>
           <a:prstGeom prst="roundRect">
             <a:avLst/>
@@ -5761,7 +6593,7 @@
           </a:solidFill>
           <a:ln w="22860">
             <a:solidFill>
-              <a:srgbClr val="2E7D6B"/>
+              <a:srgbClr val="C8A86B"/>
             </a:solidFill>
           </a:ln>
           <a:effectLst/>
@@ -5790,20 +6622,20 @@
       </p:sp>
       <p:sp>
         <p:nvSpPr>
-          <p:cNvPr id="10" name="Oval 9"/>
+          <p:cNvPr id="17" name="Oval 16"/>
           <p:cNvSpPr/>
           <p:nvPr/>
         </p:nvSpPr>
         <p:spPr>
           <a:xfrm>
-            <a:off x="804672" y="2359152"/>
-            <a:ext cx="457200" cy="457200"/>
+            <a:off x="6479895" y="2423160"/>
+            <a:ext cx="548640" cy="548640"/>
           </a:xfrm>
           <a:prstGeom prst="ellipse">
             <a:avLst/>
           </a:prstGeom>
           <a:solidFill>
-            <a:srgbClr val="2E7D6B"/>
+            <a:srgbClr val="C8A86B"/>
           </a:solidFill>
           <a:ln>
             <a:noFill/>
@@ -5834,14 +6666,14 @@
       </p:sp>
       <p:sp>
         <p:nvSpPr>
-          <p:cNvPr id="11" name="TextBox 10"/>
+          <p:cNvPr id="18" name="TextBox 17"/>
           <p:cNvSpPr txBox="1"/>
           <p:nvPr/>
         </p:nvSpPr>
         <p:spPr>
           <a:xfrm>
-            <a:off x="804672" y="2414016"/>
-            <a:ext cx="457200" cy="384048"/>
+            <a:off x="6479895" y="2487168"/>
+            <a:ext cx="548640" cy="411480"/>
           </a:xfrm>
           <a:prstGeom prst="rect">
             <a:avLst/>
@@ -5856,7 +6688,7 @@
           <a:p>
             <a:pPr algn="ctr"/>
             <a:r>
-              <a:rPr sz="1600" b="1">
+              <a:rPr sz="2000" b="1">
                 <a:solidFill>
                   <a:srgbClr val="FFFFFF"/>
                 </a:solidFill>
@@ -5864,21 +6696,21 @@
                 <a:ea typeface="微软雅黑"/>
                 <a:cs typeface="微软雅黑"/>
               </a:rPr>
-              <a:t>2</a:t>
-            </a:r>
-          </a:p>
-        </p:txBody>
-      </p:sp>
-      <p:sp>
-        <p:nvSpPr>
-          <p:cNvPr id="12" name="TextBox 11"/>
+              <a:t>3</a:t>
+            </a:r>
+          </a:p>
+        </p:txBody>
+      </p:sp>
+      <p:sp>
+        <p:nvSpPr>
+          <p:cNvPr id="19" name="TextBox 18"/>
           <p:cNvSpPr txBox="1"/>
           <p:nvPr/>
         </p:nvSpPr>
         <p:spPr>
           <a:xfrm>
-            <a:off x="1371600" y="2304288"/>
-            <a:ext cx="9997135" cy="484632"/>
+            <a:off x="7193127" y="2450592"/>
+            <a:ext cx="1356283" cy="548640"/>
           </a:xfrm>
           <a:prstGeom prst="rect">
             <a:avLst/>
@@ -5891,35 +6723,72 @@
           </a:bodyPr>
           <a:lstStyle/>
           <a:p>
+            <a:pPr algn="l"/>
+            <a:r>
+              <a:rPr sz="1600" b="1">
+                <a:solidFill>
+                  <a:srgbClr val="C8A86B"/>
+                </a:solidFill>
+                <a:latin typeface="楷体"/>
+                <a:ea typeface="楷体"/>
+                <a:cs typeface="楷体"/>
+              </a:rPr>
+              <a:t>方法</a:t>
+            </a:r>
+          </a:p>
+        </p:txBody>
+      </p:sp>
+      <p:sp>
+        <p:nvSpPr>
+          <p:cNvPr id="20" name="TextBox 19"/>
+          <p:cNvSpPr txBox="1"/>
+          <p:nvPr/>
+        </p:nvSpPr>
+        <p:spPr>
+          <a:xfrm>
+            <a:off x="6507327" y="3200400"/>
+            <a:ext cx="1996363" cy="2651760"/>
+          </a:xfrm>
+          <a:prstGeom prst="rect">
+            <a:avLst/>
+          </a:prstGeom>
+          <a:noFill/>
+        </p:spPr>
+        <p:txBody>
+          <a:bodyPr wrap="square" anchor="t" lIns="0" rIns="0" tIns="0" bIns="0">
+            <a:spAutoFit/>
+          </a:bodyPr>
+          <a:lstStyle/>
+          <a:p>
             <a:pPr algn="l">
               <a:lnSpc>
-                <a:spcPct val="110000"/>
+                <a:spcPct val="155000"/>
               </a:lnSpc>
             </a:pPr>
             <a:r>
-              <a:rPr sz="1400" b="1">
+              <a:rPr sz="1350" b="0">
                 <a:solidFill>
                   <a:srgbClr val="1C2A33"/>
                 </a:solidFill>
-                <a:latin typeface="微软雅黑"/>
-                <a:ea typeface="微软雅黑"/>
-                <a:cs typeface="微软雅黑"/>
+                <a:latin typeface="楷体"/>
+                <a:ea typeface="楷体"/>
+                <a:cs typeface="楷体"/>
               </a:rPr>
-              <a:t>Step 2 有氧第一阶段</a:t>
-            </a:r>
-          </a:p>
-        </p:txBody>
-      </p:sp>
-      <p:sp>
-        <p:nvSpPr>
-          <p:cNvPr id="13" name="Rounded Rectangle 12"/>
+              <a:t>实验法(酵母菌)。</a:t>
+            </a:r>
+          </a:p>
+        </p:txBody>
+      </p:sp>
+      <p:sp>
+        <p:nvSpPr>
+          <p:cNvPr id="21" name="Rounded Rectangle 20"/>
           <p:cNvSpPr/>
           <p:nvPr/>
         </p:nvSpPr>
         <p:spPr>
           <a:xfrm>
-            <a:off x="640080" y="3017520"/>
-            <a:ext cx="10911535" cy="685800"/>
+            <a:off x="9098051" y="2194560"/>
+            <a:ext cx="2453563" cy="3840480"/>
           </a:xfrm>
           <a:prstGeom prst="roundRect">
             <a:avLst/>
@@ -5929,7 +6798,7 @@
           </a:solidFill>
           <a:ln w="22860">
             <a:solidFill>
-              <a:srgbClr val="2E7D6B"/>
+              <a:srgbClr val="6B6258"/>
             </a:solidFill>
           </a:ln>
           <a:effectLst/>
@@ -5958,20 +6827,20 @@
       </p:sp>
       <p:sp>
         <p:nvSpPr>
-          <p:cNvPr id="14" name="Oval 13"/>
+          <p:cNvPr id="22" name="Oval 21"/>
           <p:cNvSpPr/>
           <p:nvPr/>
         </p:nvSpPr>
         <p:spPr>
           <a:xfrm>
-            <a:off x="804672" y="3182112"/>
-            <a:ext cx="457200" cy="457200"/>
+            <a:off x="9299219" y="2423160"/>
+            <a:ext cx="548640" cy="548640"/>
           </a:xfrm>
           <a:prstGeom prst="ellipse">
             <a:avLst/>
           </a:prstGeom>
           <a:solidFill>
-            <a:srgbClr val="2E7D6B"/>
+            <a:srgbClr val="6B6258"/>
           </a:solidFill>
           <a:ln>
             <a:noFill/>
@@ -6002,14 +6871,14 @@
       </p:sp>
       <p:sp>
         <p:nvSpPr>
-          <p:cNvPr id="15" name="TextBox 14"/>
+          <p:cNvPr id="23" name="TextBox 22"/>
           <p:cNvSpPr txBox="1"/>
           <p:nvPr/>
         </p:nvSpPr>
         <p:spPr>
           <a:xfrm>
-            <a:off x="804672" y="3236976"/>
-            <a:ext cx="457200" cy="384048"/>
+            <a:off x="9299219" y="2487168"/>
+            <a:ext cx="548640" cy="411480"/>
           </a:xfrm>
           <a:prstGeom prst="rect">
             <a:avLst/>
@@ -6024,175 +6893,7 @@
           <a:p>
             <a:pPr algn="ctr"/>
             <a:r>
-              <a:rPr sz="1600" b="1">
-                <a:solidFill>
-                  <a:srgbClr val="FFFFFF"/>
-                </a:solidFill>
-                <a:latin typeface="微软雅黑"/>
-                <a:ea typeface="微软雅黑"/>
-                <a:cs typeface="微软雅黑"/>
-              </a:rPr>
-              <a:t>3</a:t>
-            </a:r>
-          </a:p>
-        </p:txBody>
-      </p:sp>
-      <p:sp>
-        <p:nvSpPr>
-          <p:cNvPr id="16" name="TextBox 15"/>
-          <p:cNvSpPr txBox="1"/>
-          <p:nvPr/>
-        </p:nvSpPr>
-        <p:spPr>
-          <a:xfrm>
-            <a:off x="1371600" y="3127248"/>
-            <a:ext cx="9997135" cy="484632"/>
-          </a:xfrm>
-          <a:prstGeom prst="rect">
-            <a:avLst/>
-          </a:prstGeom>
-          <a:noFill/>
-        </p:spPr>
-        <p:txBody>
-          <a:bodyPr wrap="square" anchor="t" lIns="0" rIns="0" tIns="0" bIns="0">
-            <a:spAutoFit/>
-          </a:bodyPr>
-          <a:lstStyle/>
-          <a:p>
-            <a:pPr algn="l">
-              <a:lnSpc>
-                <a:spcPct val="110000"/>
-              </a:lnSpc>
-            </a:pPr>
-            <a:r>
-              <a:rPr sz="1400" b="1">
-                <a:solidFill>
-                  <a:srgbClr val="1C2A33"/>
-                </a:solidFill>
-                <a:latin typeface="微软雅黑"/>
-                <a:ea typeface="微软雅黑"/>
-                <a:cs typeface="微软雅黑"/>
-              </a:rPr>
-              <a:t>Step 3 有氧第二三阶段</a:t>
-            </a:r>
-          </a:p>
-        </p:txBody>
-      </p:sp>
-      <p:sp>
-        <p:nvSpPr>
-          <p:cNvPr id="17" name="Rounded Rectangle 16"/>
-          <p:cNvSpPr/>
-          <p:nvPr/>
-        </p:nvSpPr>
-        <p:spPr>
-          <a:xfrm>
-            <a:off x="640080" y="3840480"/>
-            <a:ext cx="10911535" cy="685800"/>
-          </a:xfrm>
-          <a:prstGeom prst="roundRect">
-            <a:avLst/>
-          </a:prstGeom>
-          <a:solidFill>
-            <a:srgbClr val="FFFFFF"/>
-          </a:solidFill>
-          <a:ln w="22860">
-            <a:solidFill>
-              <a:srgbClr val="2E7D6B"/>
-            </a:solidFill>
-          </a:ln>
-          <a:effectLst/>
-        </p:spPr>
-        <p:style>
-          <a:lnRef idx="1">
-            <a:schemeClr val="accent1"/>
-          </a:lnRef>
-          <a:fillRef idx="3">
-            <a:schemeClr val="accent1"/>
-          </a:fillRef>
-          <a:effectRef idx="2">
-            <a:schemeClr val="accent1"/>
-          </a:effectRef>
-          <a:fontRef idx="minor">
-            <a:schemeClr val="lt1"/>
-          </a:fontRef>
-        </p:style>
-        <p:txBody>
-          <a:bodyPr rtlCol="0" anchor="ctr"/>
-          <a:lstStyle/>
-          <a:p>
-            <a:pPr algn="ctr"/>
-          </a:p>
-        </p:txBody>
-      </p:sp>
-      <p:sp>
-        <p:nvSpPr>
-          <p:cNvPr id="18" name="Oval 17"/>
-          <p:cNvSpPr/>
-          <p:nvPr/>
-        </p:nvSpPr>
-        <p:spPr>
-          <a:xfrm>
-            <a:off x="804672" y="4005072"/>
-            <a:ext cx="457200" cy="457200"/>
-          </a:xfrm>
-          <a:prstGeom prst="ellipse">
-            <a:avLst/>
-          </a:prstGeom>
-          <a:solidFill>
-            <a:srgbClr val="2E7D6B"/>
-          </a:solidFill>
-          <a:ln>
-            <a:noFill/>
-          </a:ln>
-          <a:effectLst/>
-        </p:spPr>
-        <p:style>
-          <a:lnRef idx="1">
-            <a:schemeClr val="accent1"/>
-          </a:lnRef>
-          <a:fillRef idx="3">
-            <a:schemeClr val="accent1"/>
-          </a:fillRef>
-          <a:effectRef idx="2">
-            <a:schemeClr val="accent1"/>
-          </a:effectRef>
-          <a:fontRef idx="minor">
-            <a:schemeClr val="lt1"/>
-          </a:fontRef>
-        </p:style>
-        <p:txBody>
-          <a:bodyPr rtlCol="0" anchor="ctr"/>
-          <a:lstStyle/>
-          <a:p>
-            <a:pPr algn="ctr"/>
-          </a:p>
-        </p:txBody>
-      </p:sp>
-      <p:sp>
-        <p:nvSpPr>
-          <p:cNvPr id="19" name="TextBox 18"/>
-          <p:cNvSpPr txBox="1"/>
-          <p:nvPr/>
-        </p:nvSpPr>
-        <p:spPr>
-          <a:xfrm>
-            <a:off x="804672" y="4059936"/>
-            <a:ext cx="457200" cy="384048"/>
-          </a:xfrm>
-          <a:prstGeom prst="rect">
-            <a:avLst/>
-          </a:prstGeom>
-          <a:noFill/>
-        </p:spPr>
-        <p:txBody>
-          <a:bodyPr wrap="square" anchor="t" lIns="0" rIns="0" tIns="0" bIns="0">
-            <a:spAutoFit/>
-          </a:bodyPr>
-          <a:lstStyle/>
-          <a:p>
-            <a:pPr algn="ctr"/>
-            <a:r>
-              <a:rPr sz="1600" b="1">
+              <a:rPr sz="2000" b="1">
                 <a:solidFill>
                   <a:srgbClr val="FFFFFF"/>
                 </a:solidFill>
@@ -6207,14 +6908,14 @@
       </p:sp>
       <p:sp>
         <p:nvSpPr>
-          <p:cNvPr id="20" name="TextBox 19"/>
+          <p:cNvPr id="24" name="TextBox 23"/>
           <p:cNvSpPr txBox="1"/>
           <p:nvPr/>
         </p:nvSpPr>
         <p:spPr>
           <a:xfrm>
-            <a:off x="1371600" y="3950208"/>
-            <a:ext cx="9997135" cy="484632"/>
+            <a:off x="10012451" y="2450592"/>
+            <a:ext cx="1356283" cy="548640"/>
           </a:xfrm>
           <a:prstGeom prst="rect">
             <a:avLst/>
@@ -6227,394 +6928,95 @@
           </a:bodyPr>
           <a:lstStyle/>
           <a:p>
+            <a:pPr algn="l"/>
+            <a:r>
+              <a:rPr sz="1600" b="1">
+                <a:solidFill>
+                  <a:srgbClr val="6B6258"/>
+                </a:solidFill>
+                <a:latin typeface="楷体"/>
+                <a:ea typeface="楷体"/>
+                <a:cs typeface="楷体"/>
+              </a:rPr>
+              <a:t>方法</a:t>
+            </a:r>
+          </a:p>
+        </p:txBody>
+      </p:sp>
+      <p:sp>
+        <p:nvSpPr>
+          <p:cNvPr id="25" name="TextBox 24"/>
+          <p:cNvSpPr txBox="1"/>
+          <p:nvPr/>
+        </p:nvSpPr>
+        <p:spPr>
+          <a:xfrm>
+            <a:off x="9326651" y="3200400"/>
+            <a:ext cx="1996363" cy="2651760"/>
+          </a:xfrm>
+          <a:prstGeom prst="rect">
+            <a:avLst/>
+          </a:prstGeom>
+          <a:noFill/>
+        </p:spPr>
+        <p:txBody>
+          <a:bodyPr wrap="square" anchor="t" lIns="0" rIns="0" tIns="0" bIns="0">
+            <a:spAutoFit/>
+          </a:bodyPr>
+          <a:lstStyle/>
+          <a:p>
             <a:pPr algn="l">
               <a:lnSpc>
-                <a:spcPct val="110000"/>
+                <a:spcPct val="155000"/>
               </a:lnSpc>
             </a:pPr>
             <a:r>
-              <a:rPr sz="1600" b="1">
+              <a:rPr sz="1350" b="0">
                 <a:solidFill>
                   <a:srgbClr val="1C2A33"/>
+                </a:solidFill>
+                <a:latin typeface="楷体"/>
+                <a:ea typeface="楷体"/>
+                <a:cs typeface="楷体"/>
+              </a:rPr>
+              <a:t>总式归纳法。</a:t>
+            </a:r>
+          </a:p>
+        </p:txBody>
+      </p:sp>
+      <p:sp>
+        <p:nvSpPr>
+          <p:cNvPr id="26" name="TextBox 25"/>
+          <p:cNvSpPr txBox="1"/>
+          <p:nvPr/>
+        </p:nvSpPr>
+        <p:spPr>
+          <a:xfrm>
+            <a:off x="11002975" y="6355080"/>
+            <a:ext cx="731520" cy="320040"/>
+          </a:xfrm>
+          <a:prstGeom prst="rect">
+            <a:avLst/>
+          </a:prstGeom>
+          <a:noFill/>
+        </p:spPr>
+        <p:txBody>
+          <a:bodyPr wrap="square" anchor="t" lIns="0" rIns="0" tIns="0" bIns="0">
+            <a:spAutoFit/>
+          </a:bodyPr>
+          <a:lstStyle/>
+          <a:p>
+            <a:pPr algn="r"/>
+            <a:r>
+              <a:rPr sz="1100" b="0">
+                <a:solidFill>
+                  <a:srgbClr val="6B6258"/>
                 </a:solidFill>
                 <a:latin typeface="微软雅黑"/>
                 <a:ea typeface="微软雅黑"/>
                 <a:cs typeface="微软雅黑"/>
               </a:rPr>
-              <a:t>Step 4 总反应式</a:t>
-            </a:r>
-          </a:p>
-        </p:txBody>
-      </p:sp>
-      <p:sp>
-        <p:nvSpPr>
-          <p:cNvPr id="21" name="Rounded Rectangle 20"/>
-          <p:cNvSpPr/>
-          <p:nvPr/>
-        </p:nvSpPr>
-        <p:spPr>
-          <a:xfrm>
-            <a:off x="640080" y="4663440"/>
-            <a:ext cx="10911535" cy="685800"/>
-          </a:xfrm>
-          <a:prstGeom prst="roundRect">
-            <a:avLst/>
-          </a:prstGeom>
-          <a:solidFill>
-            <a:srgbClr val="FFFFFF"/>
-          </a:solidFill>
-          <a:ln w="22860">
-            <a:solidFill>
-              <a:srgbClr val="2E7D6B"/>
-            </a:solidFill>
-          </a:ln>
-          <a:effectLst/>
-        </p:spPr>
-        <p:style>
-          <a:lnRef idx="1">
-            <a:schemeClr val="accent1"/>
-          </a:lnRef>
-          <a:fillRef idx="3">
-            <a:schemeClr val="accent1"/>
-          </a:fillRef>
-          <a:effectRef idx="2">
-            <a:schemeClr val="accent1"/>
-          </a:effectRef>
-          <a:fontRef idx="minor">
-            <a:schemeClr val="lt1"/>
-          </a:fontRef>
-        </p:style>
-        <p:txBody>
-          <a:bodyPr rtlCol="0" anchor="ctr"/>
-          <a:lstStyle/>
-          <a:p>
-            <a:pPr algn="ctr"/>
-          </a:p>
-        </p:txBody>
-      </p:sp>
-      <p:sp>
-        <p:nvSpPr>
-          <p:cNvPr id="22" name="Oval 21"/>
-          <p:cNvSpPr/>
-          <p:nvPr/>
-        </p:nvSpPr>
-        <p:spPr>
-          <a:xfrm>
-            <a:off x="804672" y="4828032"/>
-            <a:ext cx="457200" cy="457200"/>
-          </a:xfrm>
-          <a:prstGeom prst="ellipse">
-            <a:avLst/>
-          </a:prstGeom>
-          <a:solidFill>
-            <a:srgbClr val="2E7D6B"/>
-          </a:solidFill>
-          <a:ln>
-            <a:noFill/>
-          </a:ln>
-          <a:effectLst/>
-        </p:spPr>
-        <p:style>
-          <a:lnRef idx="1">
-            <a:schemeClr val="accent1"/>
-          </a:lnRef>
-          <a:fillRef idx="3">
-            <a:schemeClr val="accent1"/>
-          </a:fillRef>
-          <a:effectRef idx="2">
-            <a:schemeClr val="accent1"/>
-          </a:effectRef>
-          <a:fontRef idx="minor">
-            <a:schemeClr val="lt1"/>
-          </a:fontRef>
-        </p:style>
-        <p:txBody>
-          <a:bodyPr rtlCol="0" anchor="ctr"/>
-          <a:lstStyle/>
-          <a:p>
-            <a:pPr algn="ctr"/>
-          </a:p>
-        </p:txBody>
-      </p:sp>
-      <p:sp>
-        <p:nvSpPr>
-          <p:cNvPr id="23" name="TextBox 22"/>
-          <p:cNvSpPr txBox="1"/>
-          <p:nvPr/>
-        </p:nvSpPr>
-        <p:spPr>
-          <a:xfrm>
-            <a:off x="804672" y="4882896"/>
-            <a:ext cx="457200" cy="384048"/>
-          </a:xfrm>
-          <a:prstGeom prst="rect">
-            <a:avLst/>
-          </a:prstGeom>
-          <a:noFill/>
-        </p:spPr>
-        <p:txBody>
-          <a:bodyPr wrap="square" anchor="t" lIns="0" rIns="0" tIns="0" bIns="0">
-            <a:spAutoFit/>
-          </a:bodyPr>
-          <a:lstStyle/>
-          <a:p>
-            <a:pPr algn="ctr"/>
-            <a:r>
-              <a:rPr sz="1600" b="1">
-                <a:solidFill>
-                  <a:srgbClr val="FFFFFF"/>
-                </a:solidFill>
-                <a:latin typeface="微软雅黑"/>
-                <a:ea typeface="微软雅黑"/>
-                <a:cs typeface="微软雅黑"/>
-              </a:rPr>
-              <a:t>5</a:t>
-            </a:r>
-          </a:p>
-        </p:txBody>
-      </p:sp>
-      <p:sp>
-        <p:nvSpPr>
-          <p:cNvPr id="24" name="TextBox 23"/>
-          <p:cNvSpPr txBox="1"/>
-          <p:nvPr/>
-        </p:nvSpPr>
-        <p:spPr>
-          <a:xfrm>
-            <a:off x="1371600" y="4773168"/>
-            <a:ext cx="9997135" cy="484632"/>
-          </a:xfrm>
-          <a:prstGeom prst="rect">
-            <a:avLst/>
-          </a:prstGeom>
-          <a:noFill/>
-        </p:spPr>
-        <p:txBody>
-          <a:bodyPr wrap="square" anchor="t" lIns="0" rIns="0" tIns="0" bIns="0">
-            <a:spAutoFit/>
-          </a:bodyPr>
-          <a:lstStyle/>
-          <a:p>
-            <a:pPr algn="l">
-              <a:lnSpc>
-                <a:spcPct val="110000"/>
-              </a:lnSpc>
-            </a:pPr>
-            <a:r>
-              <a:rPr sz="1600" b="1">
-                <a:solidFill>
-                  <a:srgbClr val="1C2A33"/>
-                </a:solidFill>
-                <a:latin typeface="微软雅黑"/>
-                <a:ea typeface="微软雅黑"/>
-                <a:cs typeface="微软雅黑"/>
-              </a:rPr>
-              <a:t>Step 5 无氧呼吸</a:t>
-            </a:r>
-          </a:p>
-        </p:txBody>
-      </p:sp>
-      <p:sp>
-        <p:nvSpPr>
-          <p:cNvPr id="25" name="Rounded Rectangle 24"/>
-          <p:cNvSpPr/>
-          <p:nvPr/>
-        </p:nvSpPr>
-        <p:spPr>
-          <a:xfrm>
-            <a:off x="640080" y="5486400"/>
-            <a:ext cx="10911535" cy="685800"/>
-          </a:xfrm>
-          <a:prstGeom prst="roundRect">
-            <a:avLst/>
-          </a:prstGeom>
-          <a:solidFill>
-            <a:srgbClr val="FFFFFF"/>
-          </a:solidFill>
-          <a:ln w="22860">
-            <a:solidFill>
-              <a:srgbClr val="2E7D6B"/>
-            </a:solidFill>
-          </a:ln>
-          <a:effectLst/>
-        </p:spPr>
-        <p:style>
-          <a:lnRef idx="1">
-            <a:schemeClr val="accent1"/>
-          </a:lnRef>
-          <a:fillRef idx="3">
-            <a:schemeClr val="accent1"/>
-          </a:fillRef>
-          <a:effectRef idx="2">
-            <a:schemeClr val="accent1"/>
-          </a:effectRef>
-          <a:fontRef idx="minor">
-            <a:schemeClr val="lt1"/>
-          </a:fontRef>
-        </p:style>
-        <p:txBody>
-          <a:bodyPr rtlCol="0" anchor="ctr"/>
-          <a:lstStyle/>
-          <a:p>
-            <a:pPr algn="ctr"/>
-          </a:p>
-        </p:txBody>
-      </p:sp>
-      <p:sp>
-        <p:nvSpPr>
-          <p:cNvPr id="26" name="Oval 25"/>
-          <p:cNvSpPr/>
-          <p:nvPr/>
-        </p:nvSpPr>
-        <p:spPr>
-          <a:xfrm>
-            <a:off x="804672" y="5650992"/>
-            <a:ext cx="457200" cy="457200"/>
-          </a:xfrm>
-          <a:prstGeom prst="ellipse">
-            <a:avLst/>
-          </a:prstGeom>
-          <a:solidFill>
-            <a:srgbClr val="2E7D6B"/>
-          </a:solidFill>
-          <a:ln>
-            <a:noFill/>
-          </a:ln>
-          <a:effectLst/>
-        </p:spPr>
-        <p:style>
-          <a:lnRef idx="1">
-            <a:schemeClr val="accent1"/>
-          </a:lnRef>
-          <a:fillRef idx="3">
-            <a:schemeClr val="accent1"/>
-          </a:fillRef>
-          <a:effectRef idx="2">
-            <a:schemeClr val="accent1"/>
-          </a:effectRef>
-          <a:fontRef idx="minor">
-            <a:schemeClr val="lt1"/>
-          </a:fontRef>
-        </p:style>
-        <p:txBody>
-          <a:bodyPr rtlCol="0" anchor="ctr"/>
-          <a:lstStyle/>
-          <a:p>
-            <a:pPr algn="ctr"/>
-          </a:p>
-        </p:txBody>
-      </p:sp>
-      <p:sp>
-        <p:nvSpPr>
-          <p:cNvPr id="27" name="TextBox 26"/>
-          <p:cNvSpPr txBox="1"/>
-          <p:nvPr/>
-        </p:nvSpPr>
-        <p:spPr>
-          <a:xfrm>
-            <a:off x="804672" y="5705856"/>
-            <a:ext cx="457200" cy="384048"/>
-          </a:xfrm>
-          <a:prstGeom prst="rect">
-            <a:avLst/>
-          </a:prstGeom>
-          <a:noFill/>
-        </p:spPr>
-        <p:txBody>
-          <a:bodyPr wrap="square" anchor="t" lIns="0" rIns="0" tIns="0" bIns="0">
-            <a:spAutoFit/>
-          </a:bodyPr>
-          <a:lstStyle/>
-          <a:p>
-            <a:pPr algn="ctr"/>
-            <a:r>
-              <a:rPr sz="1600" b="1">
-                <a:solidFill>
-                  <a:srgbClr val="FFFFFF"/>
-                </a:solidFill>
-                <a:latin typeface="微软雅黑"/>
-                <a:ea typeface="微软雅黑"/>
-                <a:cs typeface="微软雅黑"/>
-              </a:rPr>
-              <a:t>6</a:t>
-            </a:r>
-          </a:p>
-        </p:txBody>
-      </p:sp>
-      <p:sp>
-        <p:nvSpPr>
-          <p:cNvPr id="28" name="TextBox 27"/>
-          <p:cNvSpPr txBox="1"/>
-          <p:nvPr/>
-        </p:nvSpPr>
-        <p:spPr>
-          <a:xfrm>
-            <a:off x="1371600" y="5596128"/>
-            <a:ext cx="9997135" cy="484632"/>
-          </a:xfrm>
-          <a:prstGeom prst="rect">
-            <a:avLst/>
-          </a:prstGeom>
-          <a:noFill/>
-        </p:spPr>
-        <p:txBody>
-          <a:bodyPr wrap="square" anchor="t" lIns="0" rIns="0" tIns="0" bIns="0">
-            <a:spAutoFit/>
-          </a:bodyPr>
-          <a:lstStyle/>
-          <a:p>
-            <a:pPr algn="l">
-              <a:lnSpc>
-                <a:spcPct val="110000"/>
-              </a:lnSpc>
-            </a:pPr>
-            <a:r>
-              <a:rPr sz="1600" b="1">
-                <a:solidFill>
-                  <a:srgbClr val="1C2A33"/>
-                </a:solidFill>
-                <a:latin typeface="微软雅黑"/>
-                <a:ea typeface="微软雅黑"/>
-                <a:cs typeface="微软雅黑"/>
-              </a:rPr>
-              <a:t>Step 6 练习+作业</a:t>
-            </a:r>
-          </a:p>
-        </p:txBody>
-      </p:sp>
-      <p:sp>
-        <p:nvSpPr>
-          <p:cNvPr id="29" name="TextBox 28"/>
-          <p:cNvSpPr txBox="1"/>
-          <p:nvPr/>
-        </p:nvSpPr>
-        <p:spPr>
-          <a:xfrm>
-            <a:off x="11002975" y="6355080"/>
-            <a:ext cx="731520" cy="320040"/>
-          </a:xfrm>
-          <a:prstGeom prst="rect">
-            <a:avLst/>
-          </a:prstGeom>
-          <a:noFill/>
-        </p:spPr>
-        <p:txBody>
-          <a:bodyPr wrap="square" anchor="t" lIns="0" rIns="0" tIns="0" bIns="0">
-            <a:spAutoFit/>
-          </a:bodyPr>
-          <a:lstStyle/>
-          <a:p>
-            <a:pPr algn="r"/>
-            <a:r>
-              <a:rPr sz="1100" b="0">
-                <a:solidFill>
-                  <a:srgbClr val="6B6258"/>
-                </a:solidFill>
-                <a:latin typeface="微软雅黑"/>
-                <a:ea typeface="微软雅黑"/>
-                <a:cs typeface="微软雅黑"/>
-              </a:rPr>
-              <a:t>05</a:t>
+              <a:t>32</a:t>
             </a:r>
           </a:p>
         </p:txBody>
@@ -6717,7 +7119,7 @@
                 <a:ea typeface="微软雅黑"/>
                 <a:cs typeface="微软雅黑"/>
               </a:rPr>
-              <a:t>易混易错</a:t>
+              <a:t>难点</a:t>
             </a:r>
           </a:p>
         </p:txBody>
@@ -6768,14 +7170,51 @@
       </p:sp>
       <p:sp>
         <p:nvSpPr>
-          <p:cNvPr id="5" name="Rounded Rectangle 4"/>
+          <p:cNvPr id="5" name="TextBox 4"/>
+          <p:cNvSpPr txBox="1"/>
+          <p:nvPr/>
+        </p:nvSpPr>
+        <p:spPr>
+          <a:xfrm>
+            <a:off x="640080" y="1325880"/>
+            <a:ext cx="10058400" cy="548640"/>
+          </a:xfrm>
+          <a:prstGeom prst="rect">
+            <a:avLst/>
+          </a:prstGeom>
+          <a:noFill/>
+        </p:spPr>
+        <p:txBody>
+          <a:bodyPr wrap="square" anchor="t" lIns="0" rIns="0" tIns="0" bIns="0">
+            <a:spAutoFit/>
+          </a:bodyPr>
+          <a:lstStyle/>
+          <a:p>
+            <a:pPr algn="l"/>
+            <a:r>
+              <a:rPr sz="2600" b="1">
+                <a:solidFill>
+                  <a:srgbClr val="1C2A33"/>
+                </a:solidFill>
+                <a:latin typeface="楷体"/>
+                <a:ea typeface="楷体"/>
+                <a:cs typeface="楷体"/>
+              </a:rPr>
+              <a:t>易卡之处与突破</a:t>
+            </a:r>
+          </a:p>
+        </p:txBody>
+      </p:sp>
+      <p:sp>
+        <p:nvSpPr>
+          <p:cNvPr id="6" name="Rounded Rectangle 5"/>
           <p:cNvSpPr/>
           <p:nvPr/>
         </p:nvSpPr>
         <p:spPr>
           <a:xfrm>
-            <a:off x="640080" y="1417320"/>
-            <a:ext cx="5349240" cy="2057400"/>
+            <a:off x="640080" y="2194560"/>
+            <a:ext cx="3393338" cy="3840480"/>
           </a:xfrm>
           <a:prstGeom prst="roundRect">
             <a:avLst/>
@@ -6783,7 +7222,7 @@
           <a:solidFill>
             <a:srgbClr val="FFFFFF"/>
           </a:solidFill>
-          <a:ln w="22860">
+          <a:ln w="20320">
             <a:solidFill>
               <a:srgbClr val="B23A2A"/>
             </a:solidFill>
@@ -6814,14 +7253,14 @@
       </p:sp>
       <p:sp>
         <p:nvSpPr>
-          <p:cNvPr id="6" name="Oval 5"/>
+          <p:cNvPr id="7" name="Oval 6"/>
           <p:cNvSpPr/>
           <p:nvPr/>
         </p:nvSpPr>
         <p:spPr>
           <a:xfrm>
-            <a:off x="804672" y="1581912"/>
-            <a:ext cx="457200" cy="457200"/>
+            <a:off x="868680" y="2423160"/>
+            <a:ext cx="548640" cy="548640"/>
           </a:xfrm>
           <a:prstGeom prst="ellipse">
             <a:avLst/>
@@ -6858,14 +7297,14 @@
       </p:sp>
       <p:sp>
         <p:nvSpPr>
-          <p:cNvPr id="7" name="TextBox 6"/>
+          <p:cNvPr id="8" name="TextBox 7"/>
           <p:cNvSpPr txBox="1"/>
           <p:nvPr/>
         </p:nvSpPr>
         <p:spPr>
           <a:xfrm>
-            <a:off x="804672" y="1636776"/>
-            <a:ext cx="457200" cy="384048"/>
+            <a:off x="868680" y="2487168"/>
+            <a:ext cx="548640" cy="411480"/>
           </a:xfrm>
           <a:prstGeom prst="rect">
             <a:avLst/>
@@ -6880,7 +7319,7 @@
           <a:p>
             <a:pPr algn="ctr"/>
             <a:r>
-              <a:rPr sz="1600" b="1">
+              <a:rPr sz="2000" b="1">
                 <a:solidFill>
                   <a:srgbClr val="FFFFFF"/>
                 </a:solidFill>
@@ -6888,21 +7327,21 @@
                 <a:ea typeface="微软雅黑"/>
                 <a:cs typeface="微软雅黑"/>
               </a:rPr>
-              <a:t>!</a:t>
-            </a:r>
-          </a:p>
-        </p:txBody>
-      </p:sp>
-      <p:sp>
-        <p:nvSpPr>
-          <p:cNvPr id="8" name="TextBox 7"/>
+              <a:t>1</a:t>
+            </a:r>
+          </a:p>
+        </p:txBody>
+      </p:sp>
+      <p:sp>
+        <p:nvSpPr>
+          <p:cNvPr id="9" name="TextBox 8"/>
           <p:cNvSpPr txBox="1"/>
           <p:nvPr/>
         </p:nvSpPr>
         <p:spPr>
           <a:xfrm>
-            <a:off x="1371600" y="1527048"/>
-            <a:ext cx="4434840" cy="457200"/>
+            <a:off x="1554480" y="2450592"/>
+            <a:ext cx="2296058" cy="731520"/>
           </a:xfrm>
           <a:prstGeom prst="rect">
             <a:avLst/>
@@ -6917,52 +7356,11 @@
           <a:p>
             <a:pPr algn="l">
               <a:lnSpc>
-                <a:spcPct val="110000"/>
+                <a:spcPct val="130000"/>
               </a:lnSpc>
             </a:pPr>
             <a:r>
-              <a:rPr sz="1600" b="1">
-                <a:solidFill>
-                  <a:srgbClr val="1C2A33"/>
-                </a:solidFill>
-                <a:latin typeface="微软雅黑"/>
-                <a:ea typeface="微软雅黑"/>
-                <a:cs typeface="微软雅黑"/>
-              </a:rPr>
-              <a:t/>
-            </a:r>
-          </a:p>
-        </p:txBody>
-      </p:sp>
-      <p:sp>
-        <p:nvSpPr>
-          <p:cNvPr id="9" name="TextBox 8"/>
-          <p:cNvSpPr txBox="1"/>
-          <p:nvPr/>
-        </p:nvSpPr>
-        <p:spPr>
-          <a:xfrm>
-            <a:off x="1371600" y="1965960"/>
-            <a:ext cx="4434840" cy="1417320"/>
-          </a:xfrm>
-          <a:prstGeom prst="rect">
-            <a:avLst/>
-          </a:prstGeom>
-          <a:noFill/>
-        </p:spPr>
-        <p:txBody>
-          <a:bodyPr wrap="square" anchor="t" lIns="0" rIns="0" tIns="0" bIns="0">
-            <a:spAutoFit/>
-          </a:bodyPr>
-          <a:lstStyle/>
-          <a:p>
-            <a:pPr algn="l">
-              <a:lnSpc>
-                <a:spcPct val="128000"/>
-              </a:lnSpc>
-            </a:pPr>
-            <a:r>
-              <a:rPr sz="1400" b="0">
+              <a:rPr sz="1650" b="1">
                 <a:solidFill>
                   <a:srgbClr val="1C2A33"/>
                 </a:solidFill>
@@ -6970,21 +7368,62 @@
                 <a:ea typeface="楷体"/>
                 <a:cs typeface="楷体"/>
               </a:rPr>
-              <a:t>① 三阶段场所。原因：Ⅰ在质、Ⅱ在基质、Ⅲ在内膜，易混，需表。</a:t>
-            </a:r>
-          </a:p>
-        </p:txBody>
-      </p:sp>
-      <p:sp>
-        <p:nvSpPr>
-          <p:cNvPr id="10" name="Rounded Rectangle 9"/>
+              <a:t>难点 1</a:t>
+            </a:r>
+          </a:p>
+        </p:txBody>
+      </p:sp>
+      <p:sp>
+        <p:nvSpPr>
+          <p:cNvPr id="10" name="TextBox 9"/>
+          <p:cNvSpPr txBox="1"/>
+          <p:nvPr/>
+        </p:nvSpPr>
+        <p:spPr>
+          <a:xfrm>
+            <a:off x="914400" y="3246120"/>
+            <a:ext cx="2844698" cy="2651760"/>
+          </a:xfrm>
+          <a:prstGeom prst="rect">
+            <a:avLst/>
+          </a:prstGeom>
+          <a:noFill/>
+        </p:spPr>
+        <p:txBody>
+          <a:bodyPr wrap="square" anchor="t" lIns="0" rIns="0" tIns="0" bIns="0">
+            <a:spAutoFit/>
+          </a:bodyPr>
+          <a:lstStyle/>
+          <a:p>
+            <a:pPr algn="l">
+              <a:lnSpc>
+                <a:spcPct val="150000"/>
+              </a:lnSpc>
+            </a:pPr>
+            <a:r>
+              <a:rPr sz="1400" b="0">
+                <a:solidFill>
+                  <a:srgbClr val="1C2A33"/>
+                </a:solidFill>
+                <a:latin typeface="楷体"/>
+                <a:ea typeface="楷体"/>
+                <a:cs typeface="楷体"/>
+              </a:rPr>
+              <a:t>三阶段场所。原因：Ⅰ在质、Ⅱ在基质、Ⅲ在内膜，易混，需表。</a:t>
+            </a:r>
+          </a:p>
+        </p:txBody>
+      </p:sp>
+      <p:sp>
+        <p:nvSpPr>
+          <p:cNvPr id="11" name="Rounded Rectangle 10"/>
           <p:cNvSpPr/>
           <p:nvPr/>
         </p:nvSpPr>
         <p:spPr>
           <a:xfrm>
-            <a:off x="6263640" y="1417320"/>
-            <a:ext cx="5349240" cy="2057400"/>
+            <a:off x="4399178" y="2194560"/>
+            <a:ext cx="3393338" cy="3840480"/>
           </a:xfrm>
           <a:prstGeom prst="roundRect">
             <a:avLst/>
@@ -6992,9 +7431,9 @@
           <a:solidFill>
             <a:srgbClr val="FFFFFF"/>
           </a:solidFill>
-          <a:ln w="22860">
+          <a:ln w="20320">
             <a:solidFill>
-              <a:srgbClr val="B23A2A"/>
+              <a:srgbClr val="2E7D6B"/>
             </a:solidFill>
           </a:ln>
           <a:effectLst/>
@@ -7023,20 +7462,20 @@
       </p:sp>
       <p:sp>
         <p:nvSpPr>
-          <p:cNvPr id="11" name="Oval 10"/>
+          <p:cNvPr id="12" name="Oval 11"/>
           <p:cNvSpPr/>
           <p:nvPr/>
         </p:nvSpPr>
         <p:spPr>
           <a:xfrm>
-            <a:off x="6428232" y="1581912"/>
-            <a:ext cx="457200" cy="457200"/>
+            <a:off x="4627778" y="2423160"/>
+            <a:ext cx="548640" cy="548640"/>
           </a:xfrm>
           <a:prstGeom prst="ellipse">
             <a:avLst/>
           </a:prstGeom>
           <a:solidFill>
-            <a:srgbClr val="B23A2A"/>
+            <a:srgbClr val="2E7D6B"/>
           </a:solidFill>
           <a:ln>
             <a:noFill/>
@@ -7067,14 +7506,14 @@
       </p:sp>
       <p:sp>
         <p:nvSpPr>
-          <p:cNvPr id="12" name="TextBox 11"/>
+          <p:cNvPr id="13" name="TextBox 12"/>
           <p:cNvSpPr txBox="1"/>
           <p:nvPr/>
         </p:nvSpPr>
         <p:spPr>
           <a:xfrm>
-            <a:off x="6428232" y="1636776"/>
-            <a:ext cx="457200" cy="384048"/>
+            <a:off x="4627778" y="2487168"/>
+            <a:ext cx="548640" cy="411480"/>
           </a:xfrm>
           <a:prstGeom prst="rect">
             <a:avLst/>
@@ -7089,7 +7528,7 @@
           <a:p>
             <a:pPr algn="ctr"/>
             <a:r>
-              <a:rPr sz="1600" b="1">
+              <a:rPr sz="2000" b="1">
                 <a:solidFill>
                   <a:srgbClr val="FFFFFF"/>
                 </a:solidFill>
@@ -7097,21 +7536,21 @@
                 <a:ea typeface="微软雅黑"/>
                 <a:cs typeface="微软雅黑"/>
               </a:rPr>
-              <a:t>!</a:t>
-            </a:r>
-          </a:p>
-        </p:txBody>
-      </p:sp>
-      <p:sp>
-        <p:nvSpPr>
-          <p:cNvPr id="13" name="TextBox 12"/>
+              <a:t>2</a:t>
+            </a:r>
+          </a:p>
+        </p:txBody>
+      </p:sp>
+      <p:sp>
+        <p:nvSpPr>
+          <p:cNvPr id="14" name="TextBox 13"/>
           <p:cNvSpPr txBox="1"/>
           <p:nvPr/>
         </p:nvSpPr>
         <p:spPr>
           <a:xfrm>
-            <a:off x="6995160" y="1527048"/>
-            <a:ext cx="4434840" cy="457200"/>
+            <a:off x="5313578" y="2450592"/>
+            <a:ext cx="2296058" cy="731520"/>
           </a:xfrm>
           <a:prstGeom prst="rect">
             <a:avLst/>
@@ -7126,52 +7565,11 @@
           <a:p>
             <a:pPr algn="l">
               <a:lnSpc>
-                <a:spcPct val="110000"/>
+                <a:spcPct val="130000"/>
               </a:lnSpc>
             </a:pPr>
             <a:r>
-              <a:rPr sz="1600" b="1">
-                <a:solidFill>
-                  <a:srgbClr val="1C2A33"/>
-                </a:solidFill>
-                <a:latin typeface="微软雅黑"/>
-                <a:ea typeface="微软雅黑"/>
-                <a:cs typeface="微软雅黑"/>
-              </a:rPr>
-              <a:t/>
-            </a:r>
-          </a:p>
-        </p:txBody>
-      </p:sp>
-      <p:sp>
-        <p:nvSpPr>
-          <p:cNvPr id="14" name="TextBox 13"/>
-          <p:cNvSpPr txBox="1"/>
-          <p:nvPr/>
-        </p:nvSpPr>
-        <p:spPr>
-          <a:xfrm>
-            <a:off x="6995160" y="1965960"/>
-            <a:ext cx="4434840" cy="1417320"/>
-          </a:xfrm>
-          <a:prstGeom prst="rect">
-            <a:avLst/>
-          </a:prstGeom>
-          <a:noFill/>
-        </p:spPr>
-        <p:txBody>
-          <a:bodyPr wrap="square" anchor="t" lIns="0" rIns="0" tIns="0" bIns="0">
-            <a:spAutoFit/>
-          </a:bodyPr>
-          <a:lstStyle/>
-          <a:p>
-            <a:pPr algn="l">
-              <a:lnSpc>
-                <a:spcPct val="128000"/>
-              </a:lnSpc>
-            </a:pPr>
-            <a:r>
-              <a:rPr sz="1400" b="0">
+              <a:rPr sz="1650" b="1">
                 <a:solidFill>
                   <a:srgbClr val="1C2A33"/>
                 </a:solidFill>
@@ -7179,21 +7577,62 @@
                 <a:ea typeface="楷体"/>
                 <a:cs typeface="楷体"/>
               </a:rPr>
-              <a:t>② [H]与ATP分配。原因：Ⅲ产ATP最多，易错，需强调。</a:t>
-            </a:r>
-          </a:p>
-        </p:txBody>
-      </p:sp>
-      <p:sp>
-        <p:nvSpPr>
-          <p:cNvPr id="15" name="Rounded Rectangle 14"/>
+              <a:t>难点 2</a:t>
+            </a:r>
+          </a:p>
+        </p:txBody>
+      </p:sp>
+      <p:sp>
+        <p:nvSpPr>
+          <p:cNvPr id="15" name="TextBox 14"/>
+          <p:cNvSpPr txBox="1"/>
+          <p:nvPr/>
+        </p:nvSpPr>
+        <p:spPr>
+          <a:xfrm>
+            <a:off x="4673498" y="3246120"/>
+            <a:ext cx="2844698" cy="2651760"/>
+          </a:xfrm>
+          <a:prstGeom prst="rect">
+            <a:avLst/>
+          </a:prstGeom>
+          <a:noFill/>
+        </p:spPr>
+        <p:txBody>
+          <a:bodyPr wrap="square" anchor="t" lIns="0" rIns="0" tIns="0" bIns="0">
+            <a:spAutoFit/>
+          </a:bodyPr>
+          <a:lstStyle/>
+          <a:p>
+            <a:pPr algn="l">
+              <a:lnSpc>
+                <a:spcPct val="150000"/>
+              </a:lnSpc>
+            </a:pPr>
+            <a:r>
+              <a:rPr sz="1400" b="0">
+                <a:solidFill>
+                  <a:srgbClr val="1C2A33"/>
+                </a:solidFill>
+                <a:latin typeface="楷体"/>
+                <a:ea typeface="楷体"/>
+                <a:cs typeface="楷体"/>
+              </a:rPr>
+              <a:t>[H]与ATP分配。原因：Ⅲ产ATP最多，易错，需强调。</a:t>
+            </a:r>
+          </a:p>
+        </p:txBody>
+      </p:sp>
+      <p:sp>
+        <p:nvSpPr>
+          <p:cNvPr id="16" name="Rounded Rectangle 15"/>
           <p:cNvSpPr/>
           <p:nvPr/>
         </p:nvSpPr>
         <p:spPr>
           <a:xfrm>
-            <a:off x="640080" y="3703320"/>
-            <a:ext cx="5349240" cy="2057400"/>
+            <a:off x="8158276" y="2194560"/>
+            <a:ext cx="3393338" cy="3840480"/>
           </a:xfrm>
           <a:prstGeom prst="roundRect">
             <a:avLst/>
@@ -7201,9 +7640,9 @@
           <a:solidFill>
             <a:srgbClr val="FFFFFF"/>
           </a:solidFill>
-          <a:ln w="22860">
+          <a:ln w="20320">
             <a:solidFill>
-              <a:srgbClr val="B23A2A"/>
+              <a:srgbClr val="C8A86B"/>
             </a:solidFill>
           </a:ln>
           <a:effectLst/>
@@ -7232,20 +7671,20 @@
       </p:sp>
       <p:sp>
         <p:nvSpPr>
-          <p:cNvPr id="16" name="Oval 15"/>
+          <p:cNvPr id="17" name="Oval 16"/>
           <p:cNvSpPr/>
           <p:nvPr/>
         </p:nvSpPr>
         <p:spPr>
           <a:xfrm>
-            <a:off x="804672" y="3867912"/>
-            <a:ext cx="457200" cy="457200"/>
+            <a:off x="8386876" y="2423160"/>
+            <a:ext cx="548640" cy="548640"/>
           </a:xfrm>
           <a:prstGeom prst="ellipse">
             <a:avLst/>
           </a:prstGeom>
           <a:solidFill>
-            <a:srgbClr val="B23A2A"/>
+            <a:srgbClr val="C8A86B"/>
           </a:solidFill>
           <a:ln>
             <a:noFill/>
@@ -7276,14 +7715,14 @@
       </p:sp>
       <p:sp>
         <p:nvSpPr>
-          <p:cNvPr id="17" name="TextBox 16"/>
+          <p:cNvPr id="18" name="TextBox 17"/>
           <p:cNvSpPr txBox="1"/>
           <p:nvPr/>
         </p:nvSpPr>
         <p:spPr>
           <a:xfrm>
-            <a:off x="804672" y="3922776"/>
-            <a:ext cx="457200" cy="384048"/>
+            <a:off x="8386876" y="2487168"/>
+            <a:ext cx="548640" cy="411480"/>
           </a:xfrm>
           <a:prstGeom prst="rect">
             <a:avLst/>
@@ -7298,7 +7737,7 @@
           <a:p>
             <a:pPr algn="ctr"/>
             <a:r>
-              <a:rPr sz="1600" b="1">
+              <a:rPr sz="2000" b="1">
                 <a:solidFill>
                   <a:srgbClr val="FFFFFF"/>
                 </a:solidFill>
@@ -7306,21 +7745,21 @@
                 <a:ea typeface="微软雅黑"/>
                 <a:cs typeface="微软雅黑"/>
               </a:rPr>
-              <a:t>!</a:t>
-            </a:r>
-          </a:p>
-        </p:txBody>
-      </p:sp>
-      <p:sp>
-        <p:nvSpPr>
-          <p:cNvPr id="18" name="TextBox 17"/>
+              <a:t>3</a:t>
+            </a:r>
+          </a:p>
+        </p:txBody>
+      </p:sp>
+      <p:sp>
+        <p:nvSpPr>
+          <p:cNvPr id="19" name="TextBox 18"/>
           <p:cNvSpPr txBox="1"/>
           <p:nvPr/>
         </p:nvSpPr>
         <p:spPr>
           <a:xfrm>
-            <a:off x="1371600" y="3813048"/>
-            <a:ext cx="4434840" cy="457200"/>
+            <a:off x="9072676" y="2450592"/>
+            <a:ext cx="2296058" cy="731520"/>
           </a:xfrm>
           <a:prstGeom prst="rect">
             <a:avLst/>
@@ -7335,97 +7774,97 @@
           <a:p>
             <a:pPr algn="l">
               <a:lnSpc>
-                <a:spcPct val="110000"/>
+                <a:spcPct val="130000"/>
               </a:lnSpc>
             </a:pPr>
             <a:r>
-              <a:rPr sz="1600" b="1">
+              <a:rPr sz="1650" b="1">
                 <a:solidFill>
                   <a:srgbClr val="1C2A33"/>
+                </a:solidFill>
+                <a:latin typeface="楷体"/>
+                <a:ea typeface="楷体"/>
+                <a:cs typeface="楷体"/>
+              </a:rPr>
+              <a:t>难点 3</a:t>
+            </a:r>
+          </a:p>
+        </p:txBody>
+      </p:sp>
+      <p:sp>
+        <p:nvSpPr>
+          <p:cNvPr id="20" name="TextBox 19"/>
+          <p:cNvSpPr txBox="1"/>
+          <p:nvPr/>
+        </p:nvSpPr>
+        <p:spPr>
+          <a:xfrm>
+            <a:off x="8432596" y="3246120"/>
+            <a:ext cx="2844698" cy="2651760"/>
+          </a:xfrm>
+          <a:prstGeom prst="rect">
+            <a:avLst/>
+          </a:prstGeom>
+          <a:noFill/>
+        </p:spPr>
+        <p:txBody>
+          <a:bodyPr wrap="square" anchor="t" lIns="0" rIns="0" tIns="0" bIns="0">
+            <a:spAutoFit/>
+          </a:bodyPr>
+          <a:lstStyle/>
+          <a:p>
+            <a:pPr algn="l">
+              <a:lnSpc>
+                <a:spcPct val="150000"/>
+              </a:lnSpc>
+            </a:pPr>
+            <a:r>
+              <a:rPr sz="1400" b="0">
+                <a:solidFill>
+                  <a:srgbClr val="1C2A33"/>
+                </a:solidFill>
+                <a:latin typeface="楷体"/>
+                <a:ea typeface="楷体"/>
+                <a:cs typeface="楷体"/>
+              </a:rPr>
+              <a:t>无氧两类型。原因：产物不同（酒精vs乳酸），易张冠李戴，需分。</a:t>
+            </a:r>
+          </a:p>
+        </p:txBody>
+      </p:sp>
+      <p:sp>
+        <p:nvSpPr>
+          <p:cNvPr id="21" name="TextBox 20"/>
+          <p:cNvSpPr txBox="1"/>
+          <p:nvPr/>
+        </p:nvSpPr>
+        <p:spPr>
+          <a:xfrm>
+            <a:off x="11002975" y="6355080"/>
+            <a:ext cx="731520" cy="320040"/>
+          </a:xfrm>
+          <a:prstGeom prst="rect">
+            <a:avLst/>
+          </a:prstGeom>
+          <a:noFill/>
+        </p:spPr>
+        <p:txBody>
+          <a:bodyPr wrap="square" anchor="t" lIns="0" rIns="0" tIns="0" bIns="0">
+            <a:spAutoFit/>
+          </a:bodyPr>
+          <a:lstStyle/>
+          <a:p>
+            <a:pPr algn="r"/>
+            <a:r>
+              <a:rPr sz="1100" b="0">
+                <a:solidFill>
+                  <a:srgbClr val="6B6258"/>
                 </a:solidFill>
                 <a:latin typeface="微软雅黑"/>
                 <a:ea typeface="微软雅黑"/>
                 <a:cs typeface="微软雅黑"/>
               </a:rPr>
-              <a:t/>
-            </a:r>
-          </a:p>
-        </p:txBody>
-      </p:sp>
-      <p:sp>
-        <p:nvSpPr>
-          <p:cNvPr id="19" name="TextBox 18"/>
-          <p:cNvSpPr txBox="1"/>
-          <p:nvPr/>
-        </p:nvSpPr>
-        <p:spPr>
-          <a:xfrm>
-            <a:off x="1371600" y="4251960"/>
-            <a:ext cx="4434840" cy="1417320"/>
-          </a:xfrm>
-          <a:prstGeom prst="rect">
-            <a:avLst/>
-          </a:prstGeom>
-          <a:noFill/>
-        </p:spPr>
-        <p:txBody>
-          <a:bodyPr wrap="square" anchor="t" lIns="0" rIns="0" tIns="0" bIns="0">
-            <a:spAutoFit/>
-          </a:bodyPr>
-          <a:lstStyle/>
-          <a:p>
-            <a:pPr algn="l">
-              <a:lnSpc>
-                <a:spcPct val="128000"/>
-              </a:lnSpc>
-            </a:pPr>
-            <a:r>
-              <a:rPr sz="1400" b="0">
-                <a:solidFill>
-                  <a:srgbClr val="1C2A33"/>
-                </a:solidFill>
-                <a:latin typeface="楷体"/>
-                <a:ea typeface="楷体"/>
-                <a:cs typeface="楷体"/>
-              </a:rPr>
-              <a:t>③ 无氧两类型。原因：产物不同（酒精vs乳酸），易张冠李戴，需分。</a:t>
-            </a:r>
-          </a:p>
-        </p:txBody>
-      </p:sp>
-      <p:sp>
-        <p:nvSpPr>
-          <p:cNvPr id="20" name="TextBox 19"/>
-          <p:cNvSpPr txBox="1"/>
-          <p:nvPr/>
-        </p:nvSpPr>
-        <p:spPr>
-          <a:xfrm>
-            <a:off x="11002975" y="6355080"/>
-            <a:ext cx="731520" cy="320040"/>
-          </a:xfrm>
-          <a:prstGeom prst="rect">
-            <a:avLst/>
-          </a:prstGeom>
-          <a:noFill/>
-        </p:spPr>
-        <p:txBody>
-          <a:bodyPr wrap="square" anchor="t" lIns="0" rIns="0" tIns="0" bIns="0">
-            <a:spAutoFit/>
-          </a:bodyPr>
-          <a:lstStyle/>
-          <a:p>
-            <a:pPr algn="r"/>
-            <a:r>
-              <a:rPr sz="1100" b="0">
-                <a:solidFill>
-                  <a:srgbClr val="6B6258"/>
-                </a:solidFill>
-                <a:latin typeface="微软雅黑"/>
-                <a:ea typeface="微软雅黑"/>
-                <a:cs typeface="微软雅黑"/>
-              </a:rPr>
-              <a:t>06</a:t>
+              <a:t>33</a:t>
             </a:r>
           </a:p>
         </p:txBody>
@@ -7522,13 +7961,13 @@
             <a:r>
               <a:rPr sz="1300" b="1">
                 <a:solidFill>
-                  <a:srgbClr val="C8A86B"/>
+                  <a:srgbClr val="B23A2A"/>
                 </a:solidFill>
                 <a:latin typeface="微软雅黑"/>
                 <a:ea typeface="微软雅黑"/>
                 <a:cs typeface="微软雅黑"/>
               </a:rPr>
-              <a:t>要点板书</a:t>
+              <a:t>板书精华</a:t>
             </a:r>
           </a:p>
         </p:txBody>
@@ -7543,6 +7982,91 @@
           <a:xfrm>
             <a:off x="640080" y="1097280"/>
             <a:ext cx="822960" cy="30480"/>
+          </a:xfrm>
+          <a:prstGeom prst="rect">
+            <a:avLst/>
+          </a:prstGeom>
+          <a:solidFill>
+            <a:srgbClr val="B23A2A"/>
+          </a:solidFill>
+          <a:ln>
+            <a:noFill/>
+          </a:ln>
+          <a:effectLst/>
+        </p:spPr>
+        <p:style>
+          <a:lnRef idx="1">
+            <a:schemeClr val="accent1"/>
+          </a:lnRef>
+          <a:fillRef idx="3">
+            <a:schemeClr val="accent1"/>
+          </a:fillRef>
+          <a:effectRef idx="2">
+            <a:schemeClr val="accent1"/>
+          </a:effectRef>
+          <a:fontRef idx="minor">
+            <a:schemeClr val="lt1"/>
+          </a:fontRef>
+        </p:style>
+        <p:txBody>
+          <a:bodyPr rtlCol="0" anchor="ctr"/>
+          <a:lstStyle/>
+          <a:p>
+            <a:pPr algn="ctr"/>
+          </a:p>
+        </p:txBody>
+      </p:sp>
+      <p:sp>
+        <p:nvSpPr>
+          <p:cNvPr id="5" name="Rounded Rectangle 4"/>
+          <p:cNvSpPr/>
+          <p:nvPr/>
+        </p:nvSpPr>
+        <p:spPr>
+          <a:xfrm>
+            <a:off x="640080" y="1783080"/>
+            <a:ext cx="10911535" cy="4617720"/>
+          </a:xfrm>
+          <a:prstGeom prst="roundRect">
+            <a:avLst/>
+          </a:prstGeom>
+          <a:solidFill>
+            <a:srgbClr val="1C2A33"/>
+          </a:solidFill>
+          <a:effectLst/>
+        </p:spPr>
+        <p:style>
+          <a:lnRef idx="1">
+            <a:schemeClr val="accent1"/>
+          </a:lnRef>
+          <a:fillRef idx="3">
+            <a:schemeClr val="accent1"/>
+          </a:fillRef>
+          <a:effectRef idx="2">
+            <a:schemeClr val="accent1"/>
+          </a:effectRef>
+          <a:fontRef idx="minor">
+            <a:schemeClr val="lt1"/>
+          </a:fontRef>
+        </p:style>
+        <p:txBody>
+          <a:bodyPr rtlCol="0" anchor="ctr"/>
+          <a:lstStyle/>
+          <a:p>
+            <a:pPr algn="ctr"/>
+          </a:p>
+        </p:txBody>
+      </p:sp>
+      <p:sp>
+        <p:nvSpPr>
+          <p:cNvPr id="6" name="Rectangle 5"/>
+          <p:cNvSpPr/>
+          <p:nvPr/>
+        </p:nvSpPr>
+        <p:spPr>
+          <a:xfrm>
+            <a:off x="914400" y="2011680"/>
+            <a:ext cx="54864" cy="431800"/>
           </a:xfrm>
           <a:prstGeom prst="rect">
             <a:avLst/>
@@ -7579,60 +8103,14 @@
       </p:sp>
       <p:sp>
         <p:nvSpPr>
-          <p:cNvPr id="5" name="Rounded Rectangle 4"/>
-          <p:cNvSpPr/>
-          <p:nvPr/>
-        </p:nvSpPr>
-        <p:spPr>
-          <a:xfrm>
-            <a:off x="640080" y="1417320"/>
-            <a:ext cx="10911535" cy="5394960"/>
-          </a:xfrm>
-          <a:prstGeom prst="roundRect">
-            <a:avLst/>
-          </a:prstGeom>
-          <a:solidFill>
-            <a:srgbClr val="FFFFFF"/>
-          </a:solidFill>
-          <a:ln w="25400">
-            <a:solidFill>
-              <a:srgbClr val="C8A86B"/>
-            </a:solidFill>
-          </a:ln>
-          <a:effectLst/>
-        </p:spPr>
-        <p:style>
-          <a:lnRef idx="1">
-            <a:schemeClr val="accent1"/>
-          </a:lnRef>
-          <a:fillRef idx="3">
-            <a:schemeClr val="accent1"/>
-          </a:fillRef>
-          <a:effectRef idx="2">
-            <a:schemeClr val="accent1"/>
-          </a:effectRef>
-          <a:fontRef idx="minor">
-            <a:schemeClr val="lt1"/>
-          </a:fontRef>
-        </p:style>
-        <p:txBody>
-          <a:bodyPr rtlCol="0" anchor="ctr"/>
-          <a:lstStyle/>
-          <a:p>
-            <a:pPr algn="ctr"/>
-          </a:p>
-        </p:txBody>
-      </p:sp>
-      <p:sp>
-        <p:nvSpPr>
-          <p:cNvPr id="6" name="TextBox 5"/>
+          <p:cNvPr id="7" name="TextBox 6"/>
           <p:cNvSpPr txBox="1"/>
           <p:nvPr/>
         </p:nvSpPr>
         <p:spPr>
           <a:xfrm>
-            <a:off x="914400" y="1554480"/>
-            <a:ext cx="10362895" cy="5120640"/>
+            <a:off x="1143000" y="2011680"/>
+            <a:ext cx="10058400" cy="457200"/>
           </a:xfrm>
           <a:prstGeom prst="rect">
             <a:avLst/>
@@ -7645,74 +8123,161 @@
           </a:bodyPr>
           <a:lstStyle/>
           <a:p>
+            <a:pPr algn="l"/>
+            <a:r>
+              <a:rPr sz="1900" b="1">
+                <a:solidFill>
+                  <a:srgbClr val="C8A86B"/>
+                </a:solidFill>
+                <a:latin typeface="楷体"/>
+                <a:ea typeface="楷体"/>
+                <a:cs typeface="楷体"/>
+              </a:rPr>
+              <a:t>课题：细胞呼吸的过程与意义</a:t>
+            </a:r>
+          </a:p>
+        </p:txBody>
+      </p:sp>
+      <p:sp>
+        <p:nvSpPr>
+          <p:cNvPr id="8" name="TextBox 7"/>
+          <p:cNvSpPr txBox="1"/>
+          <p:nvPr/>
+        </p:nvSpPr>
+        <p:spPr>
+          <a:xfrm>
+            <a:off x="1143000" y="2697480"/>
+            <a:ext cx="9905695" cy="3566160"/>
+          </a:xfrm>
+          <a:prstGeom prst="rect">
+            <a:avLst/>
+          </a:prstGeom>
+          <a:noFill/>
+        </p:spPr>
+        <p:txBody>
+          <a:bodyPr wrap="square" anchor="t" lIns="0" rIns="0" tIns="0" bIns="0">
+            <a:spAutoFit/>
+          </a:bodyPr>
+          <a:lstStyle/>
+          <a:p>
             <a:pPr algn="l">
               <a:lnSpc>
-                <a:spcPct val="110000"/>
+                <a:spcPct val="150000"/>
               </a:lnSpc>
               <a:spcAft>
-                <a:spcPts val="100"/>
+                <a:spcPts val="1000"/>
               </a:spcAft>
             </a:pPr>
             <a:r>
-              <a:rPr sz="1300" b="0">
-                <a:solidFill>
-                  <a:srgbClr val="1C2A33"/>
+              <a:rPr sz="1500" b="0">
+                <a:solidFill>
+                  <a:srgbClr val="FFFFFF"/>
+                </a:solidFill>
+                <a:latin typeface="楷体"/>
+                <a:ea typeface="楷体"/>
+                <a:cs typeface="楷体"/>
+              </a:rPr>
+              <a:t>① 有氧三阶段：Ⅰ糖酵解(质,丙酮酸+[H]+少ATP)；Ⅱ柠檬酸循环(基质,CO2+[H]+少ATP)；Ⅲ电子链(内膜,大量ATP)。</a:t>
+            </a:r>
+          </a:p>
+          <a:p>
+            <a:pPr algn="l">
+              <a:lnSpc>
+                <a:spcPct val="150000"/>
+              </a:lnSpc>
+              <a:spcAft>
+                <a:spcPts val="1000"/>
+              </a:spcAft>
+            </a:pPr>
+            <a:r>
+              <a:rPr sz="1500" b="0">
+                <a:solidFill>
+                  <a:srgbClr val="FFFFFF"/>
+                </a:solidFill>
+                <a:latin typeface="楷体"/>
+                <a:ea typeface="楷体"/>
+                <a:cs typeface="楷体"/>
+              </a:rPr>
+              <a:t>② 总式：C6H12O6+6O2→6CO2+6H2O+能量。</a:t>
+            </a:r>
+          </a:p>
+          <a:p>
+            <a:pPr algn="l">
+              <a:lnSpc>
+                <a:spcPct val="150000"/>
+              </a:lnSpc>
+              <a:spcAft>
+                <a:spcPts val="1000"/>
+              </a:spcAft>
+            </a:pPr>
+            <a:r>
+              <a:rPr sz="1500" b="0">
+                <a:solidFill>
+                  <a:srgbClr val="FFFFFF"/>
+                </a:solidFill>
+                <a:latin typeface="楷体"/>
+                <a:ea typeface="楷体"/>
+                <a:cs typeface="楷体"/>
+              </a:rPr>
+              <a:t>③ 无氧：酒精发酵(植物/酵母)、乳酸发酵(动物/乳酸菌)，只Ⅰ阶段产ATP。</a:t>
+            </a:r>
+          </a:p>
+          <a:p>
+            <a:pPr algn="l">
+              <a:lnSpc>
+                <a:spcPct val="150000"/>
+              </a:lnSpc>
+              <a:spcAft>
+                <a:spcPts val="1000"/>
+              </a:spcAft>
+            </a:pPr>
+            <a:r>
+              <a:rPr sz="1500" b="0">
+                <a:solidFill>
+                  <a:srgbClr val="FFFFFF"/>
+                </a:solidFill>
+                <a:latin typeface="楷体"/>
+                <a:ea typeface="楷体"/>
+                <a:cs typeface="楷体"/>
+              </a:rPr>
+              <a:t>④ 有氧释放能量多，无氧少。</a:t>
+            </a:r>
+          </a:p>
+        </p:txBody>
+      </p:sp>
+      <p:sp>
+        <p:nvSpPr>
+          <p:cNvPr id="9" name="TextBox 8"/>
+          <p:cNvSpPr txBox="1"/>
+          <p:nvPr/>
+        </p:nvSpPr>
+        <p:spPr>
+          <a:xfrm>
+            <a:off x="11002975" y="6355080"/>
+            <a:ext cx="731520" cy="320040"/>
+          </a:xfrm>
+          <a:prstGeom prst="rect">
+            <a:avLst/>
+          </a:prstGeom>
+          <a:noFill/>
+        </p:spPr>
+        <p:txBody>
+          <a:bodyPr wrap="square" anchor="t" lIns="0" rIns="0" tIns="0" bIns="0">
+            <a:spAutoFit/>
+          </a:bodyPr>
+          <a:lstStyle/>
+          <a:p>
+            <a:pPr algn="r"/>
+            <a:r>
+              <a:rPr sz="1100" b="0">
+                <a:solidFill>
+                  <a:srgbClr val="6B6258"/>
                 </a:solidFill>
                 <a:latin typeface="微软雅黑"/>
                 <a:ea typeface="微软雅黑"/>
                 <a:cs typeface="微软雅黑"/>
               </a:rPr>
-              <a:t>┌── 细胞呼吸 ──┐
-│ 有氧三阶段: │
-│ Ⅰ质:糖→丙酮│
-│ 酸+[H]+少ATP│
-│ Ⅱ基质:→CO2 │
-│ +[H]+少ATP │
-│ Ⅲ内膜:[H]+O2│
-│ →H2O+多ATP│
-│ 总式:C6H12O6│
-│ +6O2→6CO2+ │
-│ 6H2O+能 │
-│ 无氧:酒精/乳│
-│ 酸(仅Ⅰ产ATP)│
-└────────────┘</a:t>
-            </a:r>
-          </a:p>
-        </p:txBody>
-      </p:sp>
-      <p:sp>
-        <p:nvSpPr>
-          <p:cNvPr id="7" name="TextBox 6"/>
-          <p:cNvSpPr txBox="1"/>
-          <p:nvPr/>
-        </p:nvSpPr>
-        <p:spPr>
-          <a:xfrm>
-            <a:off x="11002975" y="6355080"/>
-            <a:ext cx="731520" cy="320040"/>
-          </a:xfrm>
-          <a:prstGeom prst="rect">
-            <a:avLst/>
-          </a:prstGeom>
-          <a:noFill/>
-        </p:spPr>
-        <p:txBody>
-          <a:bodyPr wrap="square" anchor="t" lIns="0" rIns="0" tIns="0" bIns="0">
-            <a:spAutoFit/>
-          </a:bodyPr>
-          <a:lstStyle/>
-          <a:p>
-            <a:pPr algn="r"/>
-            <a:r>
-              <a:rPr sz="1100" b="0">
-                <a:solidFill>
-                  <a:srgbClr val="6B6258"/>
-                </a:solidFill>
-                <a:latin typeface="微软雅黑"/>
-                <a:ea typeface="微软雅黑"/>
-                <a:cs typeface="微软雅黑"/>
-              </a:rPr>
-              <a:t>07</a:t>
+              <a:t>34</a:t>
             </a:r>
           </a:p>
         </p:txBody>
@@ -7809,13 +8374,13 @@
             <a:r>
               <a:rPr sz="1300" b="1">
                 <a:solidFill>
-                  <a:srgbClr val="2E7D6B"/>
+                  <a:srgbClr val="B23A2A"/>
                 </a:solidFill>
                 <a:latin typeface="微软雅黑"/>
                 <a:ea typeface="微软雅黑"/>
                 <a:cs typeface="微软雅黑"/>
               </a:rPr>
-              <a:t>分层作业</a:t>
+              <a:t>作业</a:t>
             </a:r>
           </a:p>
         </p:txBody>
@@ -7830,6 +8395,301 @@
           <a:xfrm>
             <a:off x="640080" y="1097280"/>
             <a:ext cx="822960" cy="30480"/>
+          </a:xfrm>
+          <a:prstGeom prst="rect">
+            <a:avLst/>
+          </a:prstGeom>
+          <a:solidFill>
+            <a:srgbClr val="B23A2A"/>
+          </a:solidFill>
+          <a:ln>
+            <a:noFill/>
+          </a:ln>
+          <a:effectLst/>
+        </p:spPr>
+        <p:style>
+          <a:lnRef idx="1">
+            <a:schemeClr val="accent1"/>
+          </a:lnRef>
+          <a:fillRef idx="3">
+            <a:schemeClr val="accent1"/>
+          </a:fillRef>
+          <a:effectRef idx="2">
+            <a:schemeClr val="accent1"/>
+          </a:effectRef>
+          <a:fontRef idx="minor">
+            <a:schemeClr val="lt1"/>
+          </a:fontRef>
+        </p:style>
+        <p:txBody>
+          <a:bodyPr rtlCol="0" anchor="ctr"/>
+          <a:lstStyle/>
+          <a:p>
+            <a:pPr algn="ctr"/>
+          </a:p>
+        </p:txBody>
+      </p:sp>
+      <p:sp>
+        <p:nvSpPr>
+          <p:cNvPr id="5" name="TextBox 4"/>
+          <p:cNvSpPr txBox="1"/>
+          <p:nvPr/>
+        </p:nvSpPr>
+        <p:spPr>
+          <a:xfrm>
+            <a:off x="640080" y="1325880"/>
+            <a:ext cx="10058400" cy="548640"/>
+          </a:xfrm>
+          <a:prstGeom prst="rect">
+            <a:avLst/>
+          </a:prstGeom>
+          <a:noFill/>
+        </p:spPr>
+        <p:txBody>
+          <a:bodyPr wrap="square" anchor="t" lIns="0" rIns="0" tIns="0" bIns="0">
+            <a:spAutoFit/>
+          </a:bodyPr>
+          <a:lstStyle/>
+          <a:p>
+            <a:pPr algn="l"/>
+            <a:r>
+              <a:rPr sz="2600" b="1">
+                <a:solidFill>
+                  <a:srgbClr val="1C2A33"/>
+                </a:solidFill>
+                <a:latin typeface="楷体"/>
+                <a:ea typeface="楷体"/>
+                <a:cs typeface="楷体"/>
+              </a:rPr>
+              <a:t>分层作业</a:t>
+            </a:r>
+          </a:p>
+        </p:txBody>
+      </p:sp>
+      <p:sp>
+        <p:nvSpPr>
+          <p:cNvPr id="6" name="Rounded Rectangle 5"/>
+          <p:cNvSpPr/>
+          <p:nvPr/>
+        </p:nvSpPr>
+        <p:spPr>
+          <a:xfrm>
+            <a:off x="640080" y="2194560"/>
+            <a:ext cx="3393338" cy="3566160"/>
+          </a:xfrm>
+          <a:prstGeom prst="roundRect">
+            <a:avLst/>
+          </a:prstGeom>
+          <a:solidFill>
+            <a:srgbClr val="FFFFFF"/>
+          </a:solidFill>
+          <a:ln w="20320">
+            <a:solidFill>
+              <a:srgbClr val="B23A2A"/>
+            </a:solidFill>
+          </a:ln>
+          <a:effectLst/>
+        </p:spPr>
+        <p:style>
+          <a:lnRef idx="1">
+            <a:schemeClr val="accent1"/>
+          </a:lnRef>
+          <a:fillRef idx="3">
+            <a:schemeClr val="accent1"/>
+          </a:fillRef>
+          <a:effectRef idx="2">
+            <a:schemeClr val="accent1"/>
+          </a:effectRef>
+          <a:fontRef idx="minor">
+            <a:schemeClr val="lt1"/>
+          </a:fontRef>
+        </p:style>
+        <p:txBody>
+          <a:bodyPr rtlCol="0" anchor="ctr"/>
+          <a:lstStyle/>
+          <a:p>
+            <a:pPr algn="ctr"/>
+          </a:p>
+        </p:txBody>
+      </p:sp>
+      <p:sp>
+        <p:nvSpPr>
+          <p:cNvPr id="7" name="Rectangle 6"/>
+          <p:cNvSpPr/>
+          <p:nvPr/>
+        </p:nvSpPr>
+        <p:spPr>
+          <a:xfrm>
+            <a:off x="640080" y="2194560"/>
+            <a:ext cx="3393338" cy="548640"/>
+          </a:xfrm>
+          <a:prstGeom prst="rect">
+            <a:avLst/>
+          </a:prstGeom>
+          <a:solidFill>
+            <a:srgbClr val="B23A2A"/>
+          </a:solidFill>
+          <a:ln>
+            <a:noFill/>
+          </a:ln>
+          <a:effectLst/>
+        </p:spPr>
+        <p:style>
+          <a:lnRef idx="1">
+            <a:schemeClr val="accent1"/>
+          </a:lnRef>
+          <a:fillRef idx="3">
+            <a:schemeClr val="accent1"/>
+          </a:fillRef>
+          <a:effectRef idx="2">
+            <a:schemeClr val="accent1"/>
+          </a:effectRef>
+          <a:fontRef idx="minor">
+            <a:schemeClr val="lt1"/>
+          </a:fontRef>
+        </p:style>
+        <p:txBody>
+          <a:bodyPr rtlCol="0" anchor="ctr"/>
+          <a:lstStyle/>
+          <a:p>
+            <a:pPr algn="ctr"/>
+          </a:p>
+        </p:txBody>
+      </p:sp>
+      <p:sp>
+        <p:nvSpPr>
+          <p:cNvPr id="8" name="TextBox 7"/>
+          <p:cNvSpPr txBox="1"/>
+          <p:nvPr/>
+        </p:nvSpPr>
+        <p:spPr>
+          <a:xfrm>
+            <a:off x="640080" y="2304288"/>
+            <a:ext cx="3393338" cy="365760"/>
+          </a:xfrm>
+          <a:prstGeom prst="rect">
+            <a:avLst/>
+          </a:prstGeom>
+          <a:noFill/>
+        </p:spPr>
+        <p:txBody>
+          <a:bodyPr wrap="square" anchor="t" lIns="0" rIns="0" tIns="0" bIns="0">
+            <a:spAutoFit/>
+          </a:bodyPr>
+          <a:lstStyle/>
+          <a:p>
+            <a:pPr algn="ctr"/>
+            <a:r>
+              <a:rPr sz="1600" b="1">
+                <a:solidFill>
+                  <a:srgbClr val="FFFFFF"/>
+                </a:solidFill>
+                <a:latin typeface="微软雅黑"/>
+                <a:ea typeface="微软雅黑"/>
+                <a:cs typeface="微软雅黑"/>
+              </a:rPr>
+              <a:t>基础作业</a:t>
+            </a:r>
+          </a:p>
+        </p:txBody>
+      </p:sp>
+      <p:sp>
+        <p:nvSpPr>
+          <p:cNvPr id="9" name="TextBox 8"/>
+          <p:cNvSpPr txBox="1"/>
+          <p:nvPr/>
+        </p:nvSpPr>
+        <p:spPr>
+          <a:xfrm>
+            <a:off x="914400" y="2971800"/>
+            <a:ext cx="2844698" cy="2651760"/>
+          </a:xfrm>
+          <a:prstGeom prst="rect">
+            <a:avLst/>
+          </a:prstGeom>
+          <a:noFill/>
+        </p:spPr>
+        <p:txBody>
+          <a:bodyPr wrap="square" anchor="t" lIns="0" rIns="0" tIns="0" bIns="0">
+            <a:spAutoFit/>
+          </a:bodyPr>
+          <a:lstStyle/>
+          <a:p>
+            <a:pPr algn="l">
+              <a:lnSpc>
+                <a:spcPct val="155000"/>
+              </a:lnSpc>
+            </a:pPr>
+            <a:r>
+              <a:rPr sz="1350" b="0">
+                <a:solidFill>
+                  <a:srgbClr val="1C2A33"/>
+                </a:solidFill>
+                <a:latin typeface="楷体"/>
+                <a:ea typeface="楷体"/>
+                <a:cs typeface="楷体"/>
+              </a:rPr>
+              <a:t>1. 有氧呼吸第二、三阶段分别在线粒体的____和____进行。2. 乳酸菌无氧呼吸的产物是____。</a:t>
+            </a:r>
+          </a:p>
+        </p:txBody>
+      </p:sp>
+      <p:sp>
+        <p:nvSpPr>
+          <p:cNvPr id="10" name="Rounded Rectangle 9"/>
+          <p:cNvSpPr/>
+          <p:nvPr/>
+        </p:nvSpPr>
+        <p:spPr>
+          <a:xfrm>
+            <a:off x="4399178" y="2194560"/>
+            <a:ext cx="3393338" cy="3566160"/>
+          </a:xfrm>
+          <a:prstGeom prst="roundRect">
+            <a:avLst/>
+          </a:prstGeom>
+          <a:solidFill>
+            <a:srgbClr val="FFFFFF"/>
+          </a:solidFill>
+          <a:ln w="20320">
+            <a:solidFill>
+              <a:srgbClr val="2E7D6B"/>
+            </a:solidFill>
+          </a:ln>
+          <a:effectLst/>
+        </p:spPr>
+        <p:style>
+          <a:lnRef idx="1">
+            <a:schemeClr val="accent1"/>
+          </a:lnRef>
+          <a:fillRef idx="3">
+            <a:schemeClr val="accent1"/>
+          </a:fillRef>
+          <a:effectRef idx="2">
+            <a:schemeClr val="accent1"/>
+          </a:effectRef>
+          <a:fontRef idx="minor">
+            <a:schemeClr val="lt1"/>
+          </a:fontRef>
+        </p:style>
+        <p:txBody>
+          <a:bodyPr rtlCol="0" anchor="ctr"/>
+          <a:lstStyle/>
+          <a:p>
+            <a:pPr algn="ctr"/>
+          </a:p>
+        </p:txBody>
+      </p:sp>
+      <p:sp>
+        <p:nvSpPr>
+          <p:cNvPr id="11" name="Rectangle 10"/>
+          <p:cNvSpPr/>
+          <p:nvPr/>
+        </p:nvSpPr>
+        <p:spPr>
+          <a:xfrm>
+            <a:off x="4399178" y="2194560"/>
+            <a:ext cx="3393338" cy="548640"/>
           </a:xfrm>
           <a:prstGeom prst="rect">
             <a:avLst/>
@@ -7866,14 +8726,92 @@
       </p:sp>
       <p:sp>
         <p:nvSpPr>
-          <p:cNvPr id="5" name="Rounded Rectangle 4"/>
+          <p:cNvPr id="12" name="TextBox 11"/>
+          <p:cNvSpPr txBox="1"/>
+          <p:nvPr/>
+        </p:nvSpPr>
+        <p:spPr>
+          <a:xfrm>
+            <a:off x="4399178" y="2304288"/>
+            <a:ext cx="3393338" cy="365760"/>
+          </a:xfrm>
+          <a:prstGeom prst="rect">
+            <a:avLst/>
+          </a:prstGeom>
+          <a:noFill/>
+        </p:spPr>
+        <p:txBody>
+          <a:bodyPr wrap="square" anchor="t" lIns="0" rIns="0" tIns="0" bIns="0">
+            <a:spAutoFit/>
+          </a:bodyPr>
+          <a:lstStyle/>
+          <a:p>
+            <a:pPr algn="ctr"/>
+            <a:r>
+              <a:rPr sz="1600" b="1">
+                <a:solidFill>
+                  <a:srgbClr val="FFFFFF"/>
+                </a:solidFill>
+                <a:latin typeface="微软雅黑"/>
+                <a:ea typeface="微软雅黑"/>
+                <a:cs typeface="微软雅黑"/>
+              </a:rPr>
+              <a:t>提高作业</a:t>
+            </a:r>
+          </a:p>
+        </p:txBody>
+      </p:sp>
+      <p:sp>
+        <p:nvSpPr>
+          <p:cNvPr id="13" name="TextBox 12"/>
+          <p:cNvSpPr txBox="1"/>
+          <p:nvPr/>
+        </p:nvSpPr>
+        <p:spPr>
+          <a:xfrm>
+            <a:off x="4673498" y="2971800"/>
+            <a:ext cx="2844698" cy="2651760"/>
+          </a:xfrm>
+          <a:prstGeom prst="rect">
+            <a:avLst/>
+          </a:prstGeom>
+          <a:noFill/>
+        </p:spPr>
+        <p:txBody>
+          <a:bodyPr wrap="square" anchor="t" lIns="0" rIns="0" tIns="0" bIns="0">
+            <a:spAutoFit/>
+          </a:bodyPr>
+          <a:lstStyle/>
+          <a:p>
+            <a:pPr algn="l">
+              <a:lnSpc>
+                <a:spcPct val="155000"/>
+              </a:lnSpc>
+            </a:pPr>
+            <a:r>
+              <a:rPr sz="1350" b="0">
+                <a:solidFill>
+                  <a:srgbClr val="1C2A33"/>
+                </a:solidFill>
+                <a:latin typeface="楷体"/>
+                <a:ea typeface="楷体"/>
+                <a:cs typeface="楷体"/>
+              </a:rPr>
+              <a:t>为什么有氧呼吸比无氧呼吸释放的能量多得多？</a:t>
+            </a:r>
+          </a:p>
+        </p:txBody>
+      </p:sp>
+      <p:sp>
+        <p:nvSpPr>
+          <p:cNvPr id="14" name="Rounded Rectangle 13"/>
           <p:cNvSpPr/>
           <p:nvPr/>
         </p:nvSpPr>
         <p:spPr>
           <a:xfrm>
-            <a:off x="640080" y="1417320"/>
-            <a:ext cx="10911535" cy="1417320"/>
+            <a:off x="8158276" y="2194560"/>
+            <a:ext cx="3393338" cy="3566160"/>
           </a:xfrm>
           <a:prstGeom prst="roundRect">
             <a:avLst/>
@@ -7881,9 +8819,9 @@
           <a:solidFill>
             <a:srgbClr val="FFFFFF"/>
           </a:solidFill>
-          <a:ln w="22860">
+          <a:ln w="20320">
             <a:solidFill>
-              <a:srgbClr val="2E7D6B"/>
+              <a:srgbClr val="C8A86B"/>
             </a:solidFill>
           </a:ln>
           <a:effectLst/>
@@ -7912,107 +8850,23 @@
       </p:sp>
       <p:sp>
         <p:nvSpPr>
-          <p:cNvPr id="6" name="TextBox 5"/>
-          <p:cNvSpPr txBox="1"/>
-          <p:nvPr/>
-        </p:nvSpPr>
-        <p:spPr>
-          <a:xfrm>
-            <a:off x="1371600" y="1527048"/>
-            <a:ext cx="9997135" cy="457200"/>
-          </a:xfrm>
-          <a:prstGeom prst="rect">
-            <a:avLst/>
-          </a:prstGeom>
-          <a:noFill/>
-        </p:spPr>
-        <p:txBody>
-          <a:bodyPr wrap="square" anchor="t" lIns="0" rIns="0" tIns="0" bIns="0">
-            <a:spAutoFit/>
-          </a:bodyPr>
-          <a:lstStyle/>
-          <a:p>
-            <a:pPr algn="l">
-              <a:lnSpc>
-                <a:spcPct val="110000"/>
-              </a:lnSpc>
-            </a:pPr>
-            <a:r>
-              <a:rPr sz="1600" b="1">
-                <a:solidFill>
-                  <a:srgbClr val="1C2A33"/>
-                </a:solidFill>
-                <a:latin typeface="微软雅黑"/>
-                <a:ea typeface="微软雅黑"/>
-                <a:cs typeface="微软雅黑"/>
-              </a:rPr>
-              <a:t/>
-            </a:r>
-          </a:p>
-        </p:txBody>
-      </p:sp>
-      <p:sp>
-        <p:nvSpPr>
-          <p:cNvPr id="7" name="TextBox 6"/>
-          <p:cNvSpPr txBox="1"/>
-          <p:nvPr/>
-        </p:nvSpPr>
-        <p:spPr>
-          <a:xfrm>
-            <a:off x="1371600" y="1965960"/>
-            <a:ext cx="9997135" cy="777240"/>
-          </a:xfrm>
-          <a:prstGeom prst="rect">
-            <a:avLst/>
-          </a:prstGeom>
-          <a:noFill/>
-        </p:spPr>
-        <p:txBody>
-          <a:bodyPr wrap="square" anchor="t" lIns="0" rIns="0" tIns="0" bIns="0">
-            <a:spAutoFit/>
-          </a:bodyPr>
-          <a:lstStyle/>
-          <a:p>
-            <a:pPr algn="l">
-              <a:lnSpc>
-                <a:spcPct val="128000"/>
-              </a:lnSpc>
-            </a:pPr>
-            <a:r>
-              <a:rPr sz="1200" b="0">
-                <a:solidFill>
-                  <a:srgbClr val="1C2A33"/>
-                </a:solidFill>
-                <a:latin typeface="楷体"/>
-                <a:ea typeface="楷体"/>
-                <a:cs typeface="楷体"/>
-              </a:rPr>
-              <a:t>【基础作业】1. 有氧呼吸第二、三阶段分别在线粒体的____和____进行。2. 乳酸菌无氧呼吸的产物是____。</a:t>
-            </a:r>
-          </a:p>
-        </p:txBody>
-      </p:sp>
-      <p:sp>
-        <p:nvSpPr>
-          <p:cNvPr id="8" name="Rounded Rectangle 7"/>
+          <p:cNvPr id="15" name="Rectangle 14"/>
           <p:cNvSpPr/>
           <p:nvPr/>
         </p:nvSpPr>
         <p:spPr>
           <a:xfrm>
-            <a:off x="640080" y="2971800"/>
-            <a:ext cx="10911535" cy="1417320"/>
-          </a:xfrm>
-          <a:prstGeom prst="roundRect">
+            <a:off x="8158276" y="2194560"/>
+            <a:ext cx="3393338" cy="548640"/>
+          </a:xfrm>
+          <a:prstGeom prst="rect">
             <a:avLst/>
           </a:prstGeom>
           <a:solidFill>
-            <a:srgbClr val="FFFFFF"/>
+            <a:srgbClr val="C8A86B"/>
           </a:solidFill>
-          <a:ln w="22860">
-            <a:solidFill>
-              <a:srgbClr val="2E7D6B"/>
-            </a:solidFill>
+          <a:ln>
+            <a:noFill/>
           </a:ln>
           <a:effectLst/>
         </p:spPr>
@@ -8040,14 +8894,14 @@
       </p:sp>
       <p:sp>
         <p:nvSpPr>
-          <p:cNvPr id="9" name="TextBox 8"/>
+          <p:cNvPr id="16" name="TextBox 15"/>
           <p:cNvSpPr txBox="1"/>
           <p:nvPr/>
         </p:nvSpPr>
         <p:spPr>
           <a:xfrm>
-            <a:off x="1371600" y="3081528"/>
-            <a:ext cx="9997135" cy="457200"/>
+            <a:off x="8158276" y="2304288"/>
+            <a:ext cx="3393338" cy="365760"/>
           </a:xfrm>
           <a:prstGeom prst="rect">
             <a:avLst/>
@@ -8060,35 +8914,31 @@
           </a:bodyPr>
           <a:lstStyle/>
           <a:p>
-            <a:pPr algn="l">
-              <a:lnSpc>
-                <a:spcPct val="110000"/>
-              </a:lnSpc>
-            </a:pPr>
+            <a:pPr algn="ctr"/>
             <a:r>
               <a:rPr sz="1600" b="1">
                 <a:solidFill>
-                  <a:srgbClr val="1C2A33"/>
+                  <a:srgbClr val="FFFFFF"/>
                 </a:solidFill>
                 <a:latin typeface="微软雅黑"/>
                 <a:ea typeface="微软雅黑"/>
                 <a:cs typeface="微软雅黑"/>
               </a:rPr>
-              <a:t/>
-            </a:r>
-          </a:p>
-        </p:txBody>
-      </p:sp>
-      <p:sp>
-        <p:nvSpPr>
-          <p:cNvPr id="10" name="TextBox 9"/>
+              <a:t>巩固提示</a:t>
+            </a:r>
+          </a:p>
+        </p:txBody>
+      </p:sp>
+      <p:sp>
+        <p:nvSpPr>
+          <p:cNvPr id="17" name="TextBox 16"/>
           <p:cNvSpPr txBox="1"/>
           <p:nvPr/>
         </p:nvSpPr>
         <p:spPr>
           <a:xfrm>
-            <a:off x="1371600" y="3520440"/>
-            <a:ext cx="9997135" cy="777240"/>
+            <a:off x="8432596" y="2971800"/>
+            <a:ext cx="2844698" cy="2651760"/>
           </a:xfrm>
           <a:prstGeom prst="rect">
             <a:avLst/>
@@ -8103,11 +8953,11 @@
           <a:p>
             <a:pPr algn="l">
               <a:lnSpc>
-                <a:spcPct val="128000"/>
+                <a:spcPct val="155000"/>
               </a:lnSpc>
             </a:pPr>
             <a:r>
-              <a:rPr sz="1400" b="0">
+              <a:rPr sz="1350" b="0">
                 <a:solidFill>
                   <a:srgbClr val="1C2A33"/>
                 </a:solidFill>
@@ -8115,14 +8965,14 @@
                 <a:ea typeface="楷体"/>
                 <a:cs typeface="楷体"/>
               </a:rPr>
-              <a:t>【提高作业】为什么有氧呼吸比无氧呼吸释放的能量多得多？</a:t>
-            </a:r>
-          </a:p>
-        </p:txBody>
-      </p:sp>
-      <p:sp>
-        <p:nvSpPr>
-          <p:cNvPr id="11" name="TextBox 10"/>
+              <a:t>回看本课板书精华，用一句话概括核心过程，写在笔记本上。</a:t>
+            </a:r>
+          </a:p>
+        </p:txBody>
+      </p:sp>
+      <p:sp>
+        <p:nvSpPr>
+          <p:cNvPr id="18" name="TextBox 17"/>
           <p:cNvSpPr txBox="1"/>
           <p:nvPr/>
         </p:nvSpPr>
@@ -8152,7 +9002,7 @@
                 <a:ea typeface="微软雅黑"/>
                 <a:cs typeface="微软雅黑"/>
               </a:rPr>
-              <a:t>08</a:t>
+              <a:t>35</a:t>
             </a:r>
           </a:p>
         </p:txBody>
@@ -8249,13 +9099,13 @@
             <a:r>
               <a:rPr sz="1300" b="1">
                 <a:solidFill>
-                  <a:srgbClr val="C8A86B"/>
+                  <a:srgbClr val="B23A2A"/>
                 </a:solidFill>
                 <a:latin typeface="微软雅黑"/>
                 <a:ea typeface="微软雅黑"/>
                 <a:cs typeface="微软雅黑"/>
               </a:rPr>
-              <a:t>本课小结</a:t>
+              <a:t>单元小结</a:t>
             </a:r>
           </a:p>
         </p:txBody>
@@ -8275,7 +9125,7 @@
             <a:avLst/>
           </a:prstGeom>
           <a:solidFill>
-            <a:srgbClr val="C8A86B"/>
+            <a:srgbClr val="B23A2A"/>
           </a:solidFill>
           <a:ln>
             <a:noFill/>
@@ -8306,24 +9156,120 @@
       </p:sp>
       <p:sp>
         <p:nvSpPr>
-          <p:cNvPr id="5" name="Rectangle 4"/>
+          <p:cNvPr id="5" name="TextBox 4"/>
+          <p:cNvSpPr txBox="1"/>
+          <p:nvPr/>
+        </p:nvSpPr>
+        <p:spPr>
+          <a:xfrm>
+            <a:off x="640080" y="1280160"/>
+            <a:ext cx="10515600" cy="640080"/>
+          </a:xfrm>
+          <a:prstGeom prst="rect">
+            <a:avLst/>
+          </a:prstGeom>
+          <a:noFill/>
+        </p:spPr>
+        <p:txBody>
+          <a:bodyPr wrap="square" anchor="t" lIns="0" rIns="0" tIns="0" bIns="0">
+            <a:spAutoFit/>
+          </a:bodyPr>
+          <a:lstStyle/>
+          <a:p>
+            <a:pPr algn="l"/>
+            <a:r>
+              <a:rPr sz="2600" b="1">
+                <a:solidFill>
+                  <a:srgbClr val="1C2A33"/>
+                </a:solidFill>
+                <a:latin typeface="楷体"/>
+                <a:ea typeface="楷体"/>
+                <a:cs typeface="楷体"/>
+              </a:rPr>
+              <a:t>细胞的能量供应和利用</a:t>
+            </a:r>
+          </a:p>
+        </p:txBody>
+      </p:sp>
+      <p:sp>
+        <p:nvSpPr>
+          <p:cNvPr id="6" name="TextBox 5"/>
+          <p:cNvSpPr txBox="1"/>
+          <p:nvPr/>
+        </p:nvSpPr>
+        <p:spPr>
+          <a:xfrm>
+            <a:off x="640080" y="2057400"/>
+            <a:ext cx="5227167" cy="4206240"/>
+          </a:xfrm>
+          <a:prstGeom prst="rect">
+            <a:avLst/>
+          </a:prstGeom>
+          <a:noFill/>
+        </p:spPr>
+        <p:txBody>
+          <a:bodyPr wrap="square" anchor="t" lIns="0" rIns="0" tIns="0" bIns="0">
+            <a:spAutoFit/>
+          </a:bodyPr>
+          <a:lstStyle/>
+          <a:p>
+            <a:pPr algn="l">
+              <a:lnSpc>
+                <a:spcPct val="155000"/>
+              </a:lnSpc>
+              <a:spcAft>
+                <a:spcPts val="1000"/>
+              </a:spcAft>
+            </a:pPr>
+            <a:r>
+              <a:rPr sz="1400" b="0">
+                <a:solidFill>
+                  <a:srgbClr val="1C2A33"/>
+                </a:solidFill>
+                <a:latin typeface="楷体"/>
+                <a:ea typeface="楷体"/>
+                <a:cs typeface="楷体"/>
+              </a:rPr>
+              <a:t>有氧呼吸三阶段：糖酵解（细胞质，葡萄糖→丙酮酸+[H]+少量ATP）、柠檬酸循环（线粒体基质）、电子传递链（内膜，产大量ATP），总式C6H12O6+6O2→6CO2+6H2O+能量。无氧呼吸：酒精发酵（植物、酵母）和乳酸发酵（动物、乳酸菌），只在第一阶段产ATP。</a:t>
+            </a:r>
+          </a:p>
+          <a:p>
+            <a:pPr algn="l">
+              <a:lnSpc>
+                <a:spcPct val="150000"/>
+              </a:lnSpc>
+            </a:pPr>
+            <a:r>
+              <a:rPr sz="1350" b="0">
+                <a:solidFill>
+                  <a:srgbClr val="6B6258"/>
+                </a:solidFill>
+                <a:latin typeface="楷体"/>
+                <a:ea typeface="楷体"/>
+                <a:cs typeface="楷体"/>
+              </a:rPr>
+              <a:t>本单元线索：细胞的能量供应和利用，本课为其中一环，承上启下。</a:t>
+            </a:r>
+          </a:p>
+        </p:txBody>
+      </p:sp>
+      <p:sp>
+        <p:nvSpPr>
+          <p:cNvPr id="7" name="Rounded Rectangle 6"/>
           <p:cNvSpPr/>
           <p:nvPr/>
         </p:nvSpPr>
         <p:spPr>
           <a:xfrm>
-            <a:off x="640080" y="1737360"/>
-            <a:ext cx="54864" cy="431800"/>
-          </a:xfrm>
-          <a:prstGeom prst="rect">
+            <a:off x="6324447" y="2057400"/>
+            <a:ext cx="5227167" cy="4206240"/>
+          </a:xfrm>
+          <a:prstGeom prst="roundRect">
             <a:avLst/>
           </a:prstGeom>
           <a:solidFill>
-            <a:srgbClr val="C8A86B"/>
+            <a:srgbClr val="1C2A33"/>
           </a:solidFill>
-          <a:ln>
-            <a:noFill/>
-          </a:ln>
           <a:effectLst/>
         </p:spPr>
         <p:style>
@@ -8350,14 +9296,14 @@
       </p:sp>
       <p:sp>
         <p:nvSpPr>
-          <p:cNvPr id="6" name="TextBox 5"/>
+          <p:cNvPr id="8" name="TextBox 7"/>
           <p:cNvSpPr txBox="1"/>
           <p:nvPr/>
         </p:nvSpPr>
         <p:spPr>
           <a:xfrm>
-            <a:off x="868680" y="1645920"/>
-            <a:ext cx="10682935" cy="2194560"/>
+            <a:off x="6598767" y="2194560"/>
+            <a:ext cx="4678527" cy="457200"/>
           </a:xfrm>
           <a:prstGeom prst="rect">
             <a:avLst/>
@@ -8370,75 +9316,161 @@
           </a:bodyPr>
           <a:lstStyle/>
           <a:p>
-            <a:pPr algn="l">
-              <a:lnSpc>
-                <a:spcPct val="150000"/>
-              </a:lnSpc>
-              <a:spcAft>
-                <a:spcPts val="1000"/>
-              </a:spcAft>
-            </a:pPr>
-            <a:r>
-              <a:rPr sz="2200" b="0">
-                <a:solidFill>
-                  <a:srgbClr val="1C2A33"/>
+            <a:pPr algn="l"/>
+            <a:r>
+              <a:rPr sz="1600" b="1">
+                <a:solidFill>
+                  <a:srgbClr val="C8A86B"/>
                 </a:solidFill>
                 <a:latin typeface="楷体"/>
                 <a:ea typeface="楷体"/>
                 <a:cs typeface="楷体"/>
               </a:rPr>
-              <a:t>本单元主题：细胞的能量供应和利用。把今天学到的方法带进下一篇——自己读、自己想、自己写。</a:t>
-            </a:r>
-          </a:p>
-          <a:p>
-            <a:pPr algn="l"/>
-            <a:r>
-              <a:rPr sz="1600" b="1">
-                <a:solidFill>
-                  <a:srgbClr val="B23A2A"/>
+              <a:t>本课要点回顾</a:t>
+            </a:r>
+          </a:p>
+        </p:txBody>
+      </p:sp>
+      <p:sp>
+        <p:nvSpPr>
+          <p:cNvPr id="9" name="TextBox 8"/>
+          <p:cNvSpPr txBox="1"/>
+          <p:nvPr/>
+        </p:nvSpPr>
+        <p:spPr>
+          <a:xfrm>
+            <a:off x="6598767" y="2743200"/>
+            <a:ext cx="4678527" cy="3383280"/>
+          </a:xfrm>
+          <a:prstGeom prst="rect">
+            <a:avLst/>
+          </a:prstGeom>
+          <a:noFill/>
+        </p:spPr>
+        <p:txBody>
+          <a:bodyPr wrap="square" anchor="t" lIns="0" rIns="0" tIns="0" bIns="0">
+            <a:spAutoFit/>
+          </a:bodyPr>
+          <a:lstStyle/>
+          <a:p>
+            <a:pPr algn="l">
+              <a:lnSpc>
+                <a:spcPct val="145000"/>
+              </a:lnSpc>
+              <a:spcAft>
+                <a:spcPts val="700"/>
+              </a:spcAft>
+            </a:pPr>
+            <a:r>
+              <a:rPr sz="1250" b="0">
+                <a:solidFill>
+                  <a:srgbClr val="FFFFFF"/>
+                </a:solidFill>
+                <a:latin typeface="楷体"/>
+                <a:ea typeface="楷体"/>
+                <a:cs typeface="楷体"/>
+              </a:rPr>
+              <a:t>① 有氧三阶段：Ⅰ糖酵解(质,丙酮酸+[H]+少ATP)；Ⅱ柠檬酸循环(基质,CO2+[H]+少ATP)；Ⅲ电子链(内膜,大量ATP)。</a:t>
+            </a:r>
+          </a:p>
+          <a:p>
+            <a:pPr algn="l">
+              <a:lnSpc>
+                <a:spcPct val="145000"/>
+              </a:lnSpc>
+              <a:spcAft>
+                <a:spcPts val="700"/>
+              </a:spcAft>
+            </a:pPr>
+            <a:r>
+              <a:rPr sz="1250" b="0">
+                <a:solidFill>
+                  <a:srgbClr val="FFFFFF"/>
+                </a:solidFill>
+                <a:latin typeface="楷体"/>
+                <a:ea typeface="楷体"/>
+                <a:cs typeface="楷体"/>
+              </a:rPr>
+              <a:t>② 总式：C6H12O6+6O2→6CO2+6H2O+能量。</a:t>
+            </a:r>
+          </a:p>
+          <a:p>
+            <a:pPr algn="l">
+              <a:lnSpc>
+                <a:spcPct val="145000"/>
+              </a:lnSpc>
+              <a:spcAft>
+                <a:spcPts val="700"/>
+              </a:spcAft>
+            </a:pPr>
+            <a:r>
+              <a:rPr sz="1250" b="0">
+                <a:solidFill>
+                  <a:srgbClr val="FFFFFF"/>
+                </a:solidFill>
+                <a:latin typeface="楷体"/>
+                <a:ea typeface="楷体"/>
+                <a:cs typeface="楷体"/>
+              </a:rPr>
+              <a:t>③ 无氧：酒精发酵(植物/酵母)、乳酸发酵(动物/乳酸菌)，只Ⅰ阶段产ATP。</a:t>
+            </a:r>
+          </a:p>
+          <a:p>
+            <a:pPr algn="l">
+              <a:lnSpc>
+                <a:spcPct val="145000"/>
+              </a:lnSpc>
+              <a:spcAft>
+                <a:spcPts val="700"/>
+              </a:spcAft>
+            </a:pPr>
+            <a:r>
+              <a:rPr sz="1250" b="0">
+                <a:solidFill>
+                  <a:srgbClr val="FFFFFF"/>
+                </a:solidFill>
+                <a:latin typeface="楷体"/>
+                <a:ea typeface="楷体"/>
+                <a:cs typeface="楷体"/>
+              </a:rPr>
+              <a:t>④ 有氧释放能量多，无氧少。</a:t>
+            </a:r>
+          </a:p>
+        </p:txBody>
+      </p:sp>
+      <p:sp>
+        <p:nvSpPr>
+          <p:cNvPr id="10" name="TextBox 9"/>
+          <p:cNvSpPr txBox="1"/>
+          <p:nvPr/>
+        </p:nvSpPr>
+        <p:spPr>
+          <a:xfrm>
+            <a:off x="11002975" y="6355080"/>
+            <a:ext cx="731520" cy="320040"/>
+          </a:xfrm>
+          <a:prstGeom prst="rect">
+            <a:avLst/>
+          </a:prstGeom>
+          <a:noFill/>
+        </p:spPr>
+        <p:txBody>
+          <a:bodyPr wrap="square" anchor="t" lIns="0" rIns="0" tIns="0" bIns="0">
+            <a:spAutoFit/>
+          </a:bodyPr>
+          <a:lstStyle/>
+          <a:p>
+            <a:pPr algn="r"/>
+            <a:r>
+              <a:rPr sz="1100" b="0">
+                <a:solidFill>
+                  <a:srgbClr val="6B6258"/>
                 </a:solidFill>
                 <a:latin typeface="微软雅黑"/>
                 <a:ea typeface="微软雅黑"/>
                 <a:cs typeface="微软雅黑"/>
               </a:rPr>
-              <a:t>方法迁移：圈关键信息 → 理事件脉络 → 析人物精神</a:t>
-            </a:r>
-          </a:p>
-        </p:txBody>
-      </p:sp>
-      <p:sp>
-        <p:nvSpPr>
-          <p:cNvPr id="7" name="TextBox 6"/>
-          <p:cNvSpPr txBox="1"/>
-          <p:nvPr/>
-        </p:nvSpPr>
-        <p:spPr>
-          <a:xfrm>
-            <a:off x="11002975" y="6355080"/>
-            <a:ext cx="731520" cy="320040"/>
-          </a:xfrm>
-          <a:prstGeom prst="rect">
-            <a:avLst/>
-          </a:prstGeom>
-          <a:noFill/>
-        </p:spPr>
-        <p:txBody>
-          <a:bodyPr wrap="square" anchor="t" lIns="0" rIns="0" tIns="0" bIns="0">
-            <a:spAutoFit/>
-          </a:bodyPr>
-          <a:lstStyle/>
-          <a:p>
-            <a:pPr algn="r"/>
-            <a:r>
-              <a:rPr sz="1100" b="0">
-                <a:solidFill>
-                  <a:srgbClr val="6B6258"/>
-                </a:solidFill>
-                <a:latin typeface="微软雅黑"/>
-                <a:ea typeface="微软雅黑"/>
-                <a:cs typeface="微软雅黑"/>
-              </a:rPr>
-              <a:t>09</a:t>
+              <a:t>36</a:t>
             </a:r>
           </a:p>
         </p:txBody>
